--- a/2026-Q4/08-TheChurchsTests/Week08-TheChurchsTests.pptx
+++ b/2026-Q4/08-TheChurchsTests/Week08-TheChurchsTests.pptx
@@ -4,6 +4,9 @@
   <p:sldMasterIdLst>
     <p:sldMasterId id="2147483648" r:id="rId1"/>
   </p:sldMasterIdLst>
+  <p:notesMasterIdLst>
+    <p:notesMasterId r:id="rId9"/>
+  </p:notesMasterIdLst>
   <p:sldIdLst>
     <p:sldId id="256" r:id="rId2"/>
     <p:sldId id="257" r:id="rId3"/>
@@ -13,10 +16,7 @@
     <p:sldId id="261" r:id="rId7"/>
     <p:sldId id="262" r:id="rId8"/>
   </p:sldIdLst>
-  <p:notesMasterIdLst>
-    <p:notesMasterId r:id="rId9"/>
-  </p:notesMasterIdLst>
-  <p:sldSz cx="9144000" cy="6858000"/>
+  <p:sldSz cx="9144000" cy="6858000" type="screen4x3"/>
   <p:notesSz cx="6858000" cy="9144000"/>
   <p:defaultTextStyle>
     <a:lvl1pPr marL="0" algn="l" defTabSz="914400" rtl="0" eaLnBrk="1" latinLnBrk="0" hangingPunct="1">
@@ -110,6 +110,11 @@
       </a:defRPr>
     </a:lvl9pPr>
   </p:defaultTextStyle>
+  <p:extLst>
+    <p:ext uri="{EFAFB233-063F-42B5-8137-9DF3F51BA10A}">
+      <p15:sldGuideLst xmlns:p15="http://schemas.microsoft.com/office/powerpoint/2012/main"/>
+    </p:ext>
+  </p:extLst>
 </p:presentation>
 </file>
 
@@ -135,234 +140,10 @@
           <a:chExt cx="0" cy="0"/>
         </a:xfrm>
       </p:grpSpPr>
-      <p:sp>
-        <p:nvSpPr>
-          <p:cNvPr id="2" name="Header Placeholder 1"/>
-          <p:cNvSpPr>
-            <a:spLocks noGrp="1"/>
-          </p:cNvSpPr>
-          <p:nvPr>
-            <p:ph type="hdr" sz="quarter"/>
-          </p:nvPr>
-        </p:nvSpPr>
-        <p:spPr>
-          <a:xfrm>
-            <a:off x="0" y="0"/>
-            <a:ext cx="2971800" cy="458788"/>
-          </a:xfrm>
-          <a:prstGeom prst="rect">
-            <a:avLst/>
-          </a:prstGeom>
-        </p:spPr>
-        <p:txBody>
-          <a:bodyPr vert="horz" lIns="91440" tIns="45720" rIns="91440" bIns="45720" rtlCol="0"/>
-          <a:lstStyle>
-            <a:lvl1pPr algn="l">
-              <a:defRPr sz="1200"/>
-            </a:lvl1pPr>
-          </a:lstStyle>
-          <a:p>
-            <a:endParaRPr lang="en-US"/>
-          </a:p>
-        </p:txBody>
-      </p:sp>
-      <p:sp>
-        <p:nvSpPr>
-          <p:cNvPr id="3" name="Date Placeholder 2"/>
-          <p:cNvSpPr>
-            <a:spLocks noGrp="1"/>
-          </p:cNvSpPr>
-          <p:nvPr>
-            <p:ph type="dt" idx="1"/>
-          </p:nvPr>
-        </p:nvSpPr>
-        <p:spPr>
-          <a:xfrm>
-            <a:off x="3884613" y="0"/>
-            <a:ext cx="2971800" cy="458788"/>
-          </a:xfrm>
-          <a:prstGeom prst="rect">
-            <a:avLst/>
-          </a:prstGeom>
-        </p:spPr>
-        <p:txBody>
-          <a:bodyPr vert="horz" lIns="91440" tIns="45720" rIns="91440" bIns="45720" rtlCol="0"/>
-          <a:lstStyle>
-            <a:lvl1pPr algn="r">
-              <a:defRPr sz="1200"/>
-            </a:lvl1pPr>
-          </a:lstStyle>
-          <a:p>
-            <a:fld id="{5282F153-3F37-0F45-9E97-73ACFA13230C}" type="datetimeFigureOut">
-              <a:rPr lang="en-US"/>
-              <a:t>7/23/19</a:t>
-            </a:fld>
-            <a:endParaRPr lang="en-US"/>
-          </a:p>
-        </p:txBody>
-      </p:sp>
-      <p:sp>
-        <p:nvSpPr>
-          <p:cNvPr id="4" name="Slide Image Placeholder 3"/>
-          <p:cNvSpPr>
-            <a:spLocks noGrp="1" noRot="1" noChangeAspect="1"/>
-          </p:cNvSpPr>
-          <p:nvPr>
-            <p:ph type="sldImg" idx="2"/>
-          </p:nvPr>
-        </p:nvSpPr>
-        <p:spPr>
-          <a:xfrm>
-            <a:off x="685800" y="1143000"/>
-            <a:ext cx="5486400" cy="3086100"/>
-          </a:xfrm>
-          <a:prstGeom prst="rect">
-            <a:avLst/>
-          </a:prstGeom>
-          <a:noFill/>
-          <a:ln w="12700">
-            <a:solidFill>
-              <a:prstClr val="black"/>
-            </a:solidFill>
-          </a:ln>
-        </p:spPr>
-        <p:txBody>
-          <a:bodyPr vert="horz" lIns="91440" tIns="45720" rIns="91440" bIns="45720" rtlCol="0" anchor="ctr"/>
-          <a:lstStyle/>
-          <a:p>
-            <a:endParaRPr lang="en-US"/>
-          </a:p>
-        </p:txBody>
-      </p:sp>
-      <p:sp>
-        <p:nvSpPr>
-          <p:cNvPr id="5" name="Notes Placeholder 4"/>
-          <p:cNvSpPr>
-            <a:spLocks noGrp="1"/>
-          </p:cNvSpPr>
-          <p:nvPr>
-            <p:ph type="body" sz="quarter" idx="3"/>
-          </p:nvPr>
-        </p:nvSpPr>
-        <p:spPr>
-          <a:xfrm>
-            <a:off x="685800" y="4400550"/>
-            <a:ext cx="5486400" cy="3600450"/>
-          </a:xfrm>
-          <a:prstGeom prst="rect">
-            <a:avLst/>
-          </a:prstGeom>
-        </p:spPr>
-        <p:txBody>
-          <a:bodyPr vert="horz" lIns="91440" tIns="45720" rIns="91440" bIns="45720" rtlCol="0"/>
-          <a:lstStyle/>
-          <a:p>
-            <a:pPr lvl="0"/>
-            <a:r>
-              <a:rPr lang="en-US"/>
-              <a:t>Click to edit Master text styles</a:t>
-            </a:r>
-          </a:p>
-          <a:p>
-            <a:pPr lvl="1"/>
-            <a:r>
-              <a:rPr lang="en-US"/>
-              <a:t>Second level</a:t>
-            </a:r>
-          </a:p>
-          <a:p>
-            <a:pPr lvl="2"/>
-            <a:r>
-              <a:rPr lang="en-US"/>
-              <a:t>Third level</a:t>
-            </a:r>
-          </a:p>
-          <a:p>
-            <a:pPr lvl="3"/>
-            <a:r>
-              <a:rPr lang="en-US"/>
-              <a:t>Fourth level</a:t>
-            </a:r>
-          </a:p>
-          <a:p>
-            <a:pPr lvl="4"/>
-            <a:r>
-              <a:rPr lang="en-US"/>
-              <a:t>Fifth level</a:t>
-            </a:r>
-          </a:p>
-        </p:txBody>
-      </p:sp>
-      <p:sp>
-        <p:nvSpPr>
-          <p:cNvPr id="6" name="Footer Placeholder 5"/>
-          <p:cNvSpPr>
-            <a:spLocks noGrp="1"/>
-          </p:cNvSpPr>
-          <p:nvPr>
-            <p:ph type="ftr" sz="quarter" idx="4"/>
-          </p:nvPr>
-        </p:nvSpPr>
-        <p:spPr>
-          <a:xfrm>
-            <a:off x="0" y="8685213"/>
-            <a:ext cx="2971800" cy="458787"/>
-          </a:xfrm>
-          <a:prstGeom prst="rect">
-            <a:avLst/>
-          </a:prstGeom>
-        </p:spPr>
-        <p:txBody>
-          <a:bodyPr vert="horz" lIns="91440" tIns="45720" rIns="91440" bIns="45720" rtlCol="0" anchor="b"/>
-          <a:lstStyle>
-            <a:lvl1pPr algn="l">
-              <a:defRPr sz="1200"/>
-            </a:lvl1pPr>
-          </a:lstStyle>
-          <a:p>
-            <a:endParaRPr lang="en-US"/>
-          </a:p>
-        </p:txBody>
-      </p:sp>
-      <p:sp>
-        <p:nvSpPr>
-          <p:cNvPr id="7" name="Slide Number Placeholder 6"/>
-          <p:cNvSpPr>
-            <a:spLocks noGrp="1"/>
-          </p:cNvSpPr>
-          <p:nvPr>
-            <p:ph type="sldNum" sz="quarter" idx="5"/>
-          </p:nvPr>
-        </p:nvSpPr>
-        <p:spPr>
-          <a:xfrm>
-            <a:off x="3884613" y="8685213"/>
-            <a:ext cx="2971800" cy="458787"/>
-          </a:xfrm>
-          <a:prstGeom prst="rect">
-            <a:avLst/>
-          </a:prstGeom>
-        </p:spPr>
-        <p:txBody>
-          <a:bodyPr vert="horz" lIns="91440" tIns="45720" rIns="91440" bIns="45720" rtlCol="0" anchor="b"/>
-          <a:lstStyle>
-            <a:lvl1pPr algn="r">
-              <a:defRPr sz="1200"/>
-            </a:lvl1pPr>
-          </a:lstStyle>
-          <a:p>
-            <a:fld id="{CE5E9CC1-C706-0F49-92D6-E571CC5EEA8F}" type="slidenum">
-              <a:rPr lang="en-US"/>
-              <a:t>‹#›</a:t>
-            </a:fld>
-            <a:endParaRPr lang="en-US"/>
-          </a:p>
-        </p:txBody>
-      </p:sp>
     </p:spTree>
     <p:extLst>
       <p:ext uri="{BB962C8B-B14F-4D97-AF65-F5344CB8AC3E}">
-        <p14:creationId xmlns:p14="http://schemas.microsoft.com/office/powerpoint/2010/main" val="1024086991"/>
+        <p14:creationId xmlns:p14="http://schemas.microsoft.com/office/powerpoint/2010/main" val="1410070063"/>
       </p:ext>
     </p:extLst>
   </p:cSld>
@@ -490,6 +271,13 @@
           </p:nvPr>
         </p:nvSpPr>
         <p:spPr/>
+        <p:txBody>
+          <a:bodyPr/>
+          <a:lstStyle/>
+          <a:p>
+            <a:endParaRPr lang="en-US"/>
+          </a:p>
+        </p:txBody>
       </p:sp>
       <p:sp>
         <p:nvSpPr>
@@ -508,9 +296,16 @@
           <a:p>
             <a:r>
               <a:rPr lang="en-US" dirty="0"/>
-              <a:t>[0:00] The course’s sharpest question, asked plainly: “Last week — every covenant tests faith. So what are OURS? Does the New Covenant set specific tests for the church?” Point at 2 Cor 2:9: Paul says he writes his letters precisely to test obedience. The answer is yes, and today we name them. Keep the Week 4/7 guardrail nearby: these prove a faith already saved by grace.</a:t>
-            </a:r>
-            <a:endParaRPr lang="en-US" dirty="0"/>
+              <a:t>[0:00] The course’s sharpest question, asked plainly: “Last week </a:t>
+            </a:r>
+            <a:r>
+              <a:rPr lang="en-US"/>
+              <a:t>→</a:t>
+            </a:r>
+            <a:r>
+              <a:rPr lang="en-US" dirty="0"/>
+              <a:t> every covenant tests faith. So what are OURS? Does the New Covenant set specific tests for the church?” Point at 2 Cor 2:9: Paul says he writes his letters precisely to test obedience. The answer is yes, and today we name them. Keep the Week 4/7 guardrail nearby: these prove a faith already saved by grace.</a:t>
+            </a:r>
           </a:p>
         </p:txBody>
       </p:sp>
@@ -578,6 +373,13 @@
           </p:nvPr>
         </p:nvSpPr>
         <p:spPr/>
+        <p:txBody>
+          <a:bodyPr/>
+          <a:lstStyle/>
+          <a:p>
+            <a:endParaRPr lang="en-US"/>
+          </a:p>
+        </p:txBody>
       </p:sp>
       <p:sp>
         <p:nvSpPr>
@@ -597,12 +399,51 @@
             <a:r>
               <a:rPr lang="en-US" dirty="0"/>
               <a:t>[0:00–10:00]
-[CLICK] Three texts — the gospel is OBEYED, not merely assented to. “Obey the gospel” is Paul’s and Peter’s ordinary language. Note Rom 6:17 — conversion described as obedience “from the heart.”
-[CLICK] The logic — obedience presupposes commands; a command is the test-point where trust becomes act. This is how a gospel of grace still has tests without becoming works-salvation (the command comes to the already-rescued, Week 4).
-[CLICK] 2 Cor 2:9 — the sharpest single text: Paul WRITES in order to test obedience. Apostolic instruction is by design a test.
-[CLICK] Close the Romans loop (Week 1’s bookends), then name the four categories the lecture will walk. Preview only. Transition: “Start at the door — the entry test.”</a:t>
-            </a:r>
-            <a:endParaRPr lang="en-US" dirty="0"/>
+[CLICK] Three texts </a:t>
+            </a:r>
+            <a:r>
+              <a:rPr lang="en-US"/>
+              <a:t>→ </a:t>
+            </a:r>
+            <a:r>
+              <a:rPr lang="en-US" dirty="0"/>
+              <a:t>the gospel is OBEYED, not merely assented to. “Obey the gospel” is Paul’s and Peter’s ordinary language. Note Rom 6:17 </a:t>
+            </a:r>
+            <a:r>
+              <a:rPr lang="en-US"/>
+              <a:t>→ </a:t>
+            </a:r>
+            <a:r>
+              <a:rPr lang="en-US" dirty="0"/>
+              <a:t>conversion described as obedience “from the heart.”
+[CLICK] The logic </a:t>
+            </a:r>
+            <a:r>
+              <a:rPr lang="en-US"/>
+              <a:t>→ </a:t>
+            </a:r>
+            <a:r>
+              <a:rPr lang="en-US" dirty="0"/>
+              <a:t>obedience presupposes commands; a command is the test-point where trust becomes act. This is how a gospel of grace still has tests without becoming works-salvation (the command comes to the already-rescued, Week 4).
+[CLICK] 2 Cor 2:9 </a:t>
+            </a:r>
+            <a:r>
+              <a:rPr lang="en-US"/>
+              <a:t>→ </a:t>
+            </a:r>
+            <a:r>
+              <a:rPr lang="en-US" dirty="0"/>
+              <a:t>the sharpest single text: Paul WRITES in order to test obedience. Apostolic instruction is by design a test.
+[CLICK] Close the Romans loop (Week 1’s bookends), then name the four categories the lecture will walk. Preview only. Transition: “Start at the door </a:t>
+            </a:r>
+            <a:r>
+              <a:rPr lang="en-US"/>
+              <a:t>→</a:t>
+            </a:r>
+            <a:r>
+              <a:rPr lang="en-US" dirty="0"/>
+              <a:t> the entry test.”</a:t>
+            </a:r>
           </a:p>
         </p:txBody>
       </p:sp>
@@ -670,6 +511,13 @@
           </p:nvPr>
         </p:nvSpPr>
         <p:spPr/>
+        <p:txBody>
+          <a:bodyPr/>
+          <a:lstStyle/>
+          <a:p>
+            <a:endParaRPr lang="en-US"/>
+          </a:p>
+        </p:txBody>
       </p:sp>
       <p:sp>
         <p:nvSpPr>
@@ -689,12 +537,51 @@
             <a:r>
               <a:rPr lang="en-US" dirty="0"/>
               <a:t>[10:00–22:00]
-[CLICK] The three threshold commands — confess, repent, be baptized. These are not additions to faith; they are what believing faith DOES when it meets the gospel’s call. Keep grace-first: the command comes to one being rescued, not to earn rescue.
-[CLICK] Luke 7:29–30 — the jewel of this week. Refusing John’s baptism was the RECORDED VERDICT on the experts’ entire posture toward God’s purpose. A modest water rite exposed everything — exactly like the forbidden tree. The common people acknowledged God’s justice by submitting.
-[CLICK] Col 2:11–12 — baptism stands where circumcision stood: the New Covenant’s entry marker, “through faith.” Don’t over-argue mode/mechanics; the point is that entry has a commanded, revealing act.
-[CLICK] Rom 6:17 — conversion IS obedience from the heart. Transition: “Entry happens once. But the covenant also schedules a RECURRING test.”</a:t>
-            </a:r>
-            <a:endParaRPr lang="en-US" dirty="0"/>
+[CLICK] The three threshold commands </a:t>
+            </a:r>
+            <a:r>
+              <a:rPr lang="en-US"/>
+              <a:t>→ </a:t>
+            </a:r>
+            <a:r>
+              <a:rPr lang="en-US" dirty="0"/>
+              <a:t>confess, repent, be baptized. These are not additions to faith; they are what believing faith DOES when it meets the gospel’s call. Keep grace-first: the command comes to one being rescued, not to earn rescue.
+[CLICK] Luke 7:29–30 </a:t>
+            </a:r>
+            <a:r>
+              <a:rPr lang="en-US"/>
+              <a:t>→ </a:t>
+            </a:r>
+            <a:r>
+              <a:rPr lang="en-US" dirty="0"/>
+              <a:t>the jewel of this week. Refusing John’s baptism was the RECORDED VERDICT on the experts’ entire posture toward God’s purpose. A modest water rite exposed everything </a:t>
+            </a:r>
+            <a:r>
+              <a:rPr lang="en-US"/>
+              <a:t>→ </a:t>
+            </a:r>
+            <a:r>
+              <a:rPr lang="en-US" dirty="0"/>
+              <a:t>exactly like the forbidden tree. The common people acknowledged God’s justice by submitting.
+[CLICK] Col 2:11–12 </a:t>
+            </a:r>
+            <a:r>
+              <a:rPr lang="en-US"/>
+              <a:t>→ </a:t>
+            </a:r>
+            <a:r>
+              <a:rPr lang="en-US" dirty="0"/>
+              <a:t>baptism stands where circumcision stood: the New Covenant’s entry marker, “through faith.” Don’t over-argue mode/mechanics; the point is that entry has a commanded, revealing act.
+[CLICK] Rom 6:17 </a:t>
+            </a:r>
+            <a:r>
+              <a:rPr lang="en-US"/>
+              <a:t>→</a:t>
+            </a:r>
+            <a:r>
+              <a:rPr lang="en-US" dirty="0"/>
+              <a:t> conversion IS obedience from the heart. Transition: “Entry happens once. But the covenant also schedules a RECURRING test.”</a:t>
+            </a:r>
           </a:p>
         </p:txBody>
       </p:sp>
@@ -762,6 +649,13 @@
           </p:nvPr>
         </p:nvSpPr>
         <p:spPr/>
+        <p:txBody>
+          <a:bodyPr/>
+          <a:lstStyle/>
+          <a:p>
+            <a:endParaRPr lang="en-US"/>
+          </a:p>
+        </p:txBody>
       </p:sp>
       <p:sp>
         <p:nvSpPr>
@@ -781,12 +675,51 @@
             <a:r>
               <a:rPr lang="en-US" dirty="0"/>
               <a:t>[22:00–32:00]
-[CLICK] 1 Cor 11:28 — the ONLY ordinance with a standing commanded self-examination. This reframes communion from ritual-to-perform into weekly-test-to-pass. The old covenant had scheduled tests; so do we.
-[CLICK] dokimazeto — the SAME assay word from Week 5. Not morbid introspection; the Berean eye turned inward. Note the real stakes in 11:27–30 (some are weak, ill, have died) — handle soberly, not to terrify. The self-exam is the mercy that prevents the judgment.
-[CLICK] The assembly (Heb 10:25) — chronic absence is a SYMPTOM. Frame pastorally: not “come or else” but “withdrawal usually reveals something upstream.”
-[CLICK] Forgiveness (Matt 6:14–15) — Jesus makes it conditional, so it functions as a diagnosis: an unforgiving heart at the table is a warning light. Land: the meal asks the covenant question weekly. Transition: “Beyond the scheduled tests, two more kinds run constantly.”</a:t>
-            </a:r>
-            <a:endParaRPr lang="en-US" dirty="0"/>
+[CLICK] 1 Cor 11:28 </a:t>
+            </a:r>
+            <a:r>
+              <a:rPr lang="en-US"/>
+              <a:t>→ </a:t>
+            </a:r>
+            <a:r>
+              <a:rPr lang="en-US" dirty="0"/>
+              <a:t>the ONLY ordinance with a standing commanded self-examination. This reframes communion from ritual-to-perform into weekly-test-to-pass. The old covenant had scheduled tests; so do we.
+[CLICK] dokimazeto </a:t>
+            </a:r>
+            <a:r>
+              <a:rPr lang="en-US"/>
+              <a:t>→ </a:t>
+            </a:r>
+            <a:r>
+              <a:rPr lang="en-US" dirty="0"/>
+              <a:t>the SAME assay word from Week 5. Not morbid introspection; the Berean eye turned inward. Note the real stakes in 11:27–30 (some are weak, ill, have died) </a:t>
+            </a:r>
+            <a:r>
+              <a:rPr lang="en-US"/>
+              <a:t>→ </a:t>
+            </a:r>
+            <a:r>
+              <a:rPr lang="en-US" dirty="0"/>
+              <a:t>handle soberly, not to terrify. The self-exam is the mercy that prevents the judgment.
+[CLICK] The assembly (Heb 10:25) </a:t>
+            </a:r>
+            <a:r>
+              <a:rPr lang="en-US"/>
+              <a:t>→ </a:t>
+            </a:r>
+            <a:r>
+              <a:rPr lang="en-US" dirty="0"/>
+              <a:t>chronic absence is a SYMPTOM. Frame pastorally: not “come or else” but “withdrawal usually reveals something upstream.”
+[CLICK] Forgiveness (Matt 6:14–15) </a:t>
+            </a:r>
+            <a:r>
+              <a:rPr lang="en-US"/>
+              <a:t>→</a:t>
+            </a:r>
+            <a:r>
+              <a:rPr lang="en-US" dirty="0"/>
+              <a:t> Jesus makes it conditional, so it functions as a diagnosis: an unforgiving heart at the table is a warning light. Land: the meal asks the covenant question weekly. Transition: “Beyond the scheduled tests, two more kinds run constantly.”</a:t>
+            </a:r>
           </a:p>
         </p:txBody>
       </p:sp>
@@ -854,6 +787,13 @@
           </p:nvPr>
         </p:nvSpPr>
         <p:spPr/>
+        <p:txBody>
+          <a:bodyPr/>
+          <a:lstStyle/>
+          <a:p>
+            <a:endParaRPr lang="en-US"/>
+          </a:p>
+        </p:txBody>
       </p:sp>
       <p:sp>
         <p:nvSpPr>
@@ -872,13 +812,76 @@
           <a:p>
             <a:r>
               <a:rPr lang="en-US" dirty="0"/>
-              <a:t>[32:00–45:00 — 3 columns appear, then the summary; ~3 min per column]
-[CLICK] CONTINUOUS — 1 John’s three refrains, all “by this we know.” Not tests you sit once but the standing evidences of real life: obedience, love, sound doctrine. Assurance grows here (ties to Week 4’s Spirit-witness).
-[CLICK] PROVIDENTIAL — the tests God SENDS rather than commands. Suffering refines (Week 7’s gold). And money — 2 Cor 8:8 is startling: Paul calls a giving opportunity a test of love’s genuineness. Wealth is our daily manna, the ongoing proof of which master we serve (Matt 6:24).
-[CLICK] FINAL — self-examine NOW (2 Cor 13:5) so the last exam holds no surprises. Matt 7:21–27: “Lord, Lord” is not enough; DOING the Father’s will is the divide. The two builders — same sermon heard, storm reveals who built on doing vs. hearing-only.
-[CLICK] The summary — 1 John as the tests-of-life book; the final court is deeds flowing from faith, not profession alone. Keep grace close: this judges the reality of faith, it doesn’t replace grace with merit (Eph 2:10 — created FOR good works). To discussion.</a:t>
-            </a:r>
-            <a:endParaRPr lang="en-US" dirty="0"/>
+              <a:t>[32:00–45:00 </a:t>
+            </a:r>
+            <a:r>
+              <a:rPr lang="en-US"/>
+              <a:t>→ </a:t>
+            </a:r>
+            <a:r>
+              <a:rPr lang="en-US" dirty="0"/>
+              <a:t>3 columns appear, then the summary; ~3 min per column]
+[CLICK] CONTINUOUS </a:t>
+            </a:r>
+            <a:r>
+              <a:rPr lang="en-US"/>
+              <a:t>→ </a:t>
+            </a:r>
+            <a:r>
+              <a:rPr lang="en-US" dirty="0"/>
+              <a:t>1 John’s three refrains, all “by this we know.” Not tests you sit once but the standing evidences of real life: obedience, love, sound doctrine. Assurance grows here (ties to Week 4’s Spirit-witness).
+[CLICK] PROVIDENTIAL </a:t>
+            </a:r>
+            <a:r>
+              <a:rPr lang="en-US"/>
+              <a:t>→ </a:t>
+            </a:r>
+            <a:r>
+              <a:rPr lang="en-US" dirty="0"/>
+              <a:t>the tests God SENDS rather than commands. Suffering refines (Week 7’s gold). And money </a:t>
+            </a:r>
+            <a:r>
+              <a:rPr lang="en-US"/>
+              <a:t>→ </a:t>
+            </a:r>
+            <a:r>
+              <a:rPr lang="en-US" dirty="0"/>
+              <a:t>2 Cor 8:8 is startling: Paul calls a giving opportunity a test of love’s genuineness. Wealth is our daily manna, the ongoing proof of which master we serve (Matt 6:24).
+[CLICK] FINAL </a:t>
+            </a:r>
+            <a:r>
+              <a:rPr lang="en-US"/>
+              <a:t>→ </a:t>
+            </a:r>
+            <a:r>
+              <a:rPr lang="en-US" dirty="0"/>
+              <a:t>self-examine NOW (2 Cor 13:5) so the last exam holds no surprises. Matt 7:21–27: “Lord, Lord” is not enough; DOING the Father’s will is the divide. The two builders </a:t>
+            </a:r>
+            <a:r>
+              <a:rPr lang="en-US"/>
+              <a:t>→ </a:t>
+            </a:r>
+            <a:r>
+              <a:rPr lang="en-US" dirty="0"/>
+              <a:t>same sermon heard, storm reveals who built on doing vs. hearing-only.
+[CLICK] The summary </a:t>
+            </a:r>
+            <a:r>
+              <a:rPr lang="en-US"/>
+              <a:t>→ </a:t>
+            </a:r>
+            <a:r>
+              <a:rPr lang="en-US" dirty="0"/>
+              <a:t>1 John as the tests-of-life book; the final court is deeds flowing from faith, not profession alone. Keep grace close: this judges the reality of faith, it doesn’t replace grace with merit (Eph 2:10 </a:t>
+            </a:r>
+            <a:r>
+              <a:rPr lang="en-US"/>
+              <a:t>→</a:t>
+            </a:r>
+            <a:r>
+              <a:rPr lang="en-US" dirty="0"/>
+              <a:t> created FOR good works). To discussion.</a:t>
+            </a:r>
           </a:p>
         </p:txBody>
       </p:sp>
@@ -946,6 +949,13 @@
           </p:nvPr>
         </p:nvSpPr>
         <p:spPr/>
+        <p:txBody>
+          <a:bodyPr/>
+          <a:lstStyle/>
+          <a:p>
+            <a:endParaRPr lang="en-US"/>
+          </a:p>
+        </p:txBody>
       </p:sp>
       <p:sp>
         <p:nvSpPr>
@@ -965,11 +975,26 @@
             <a:r>
               <a:rPr lang="en-US" dirty="0"/>
               <a:t>[45:00–55:00]
-Q1: A gentle mirror on the congregation — not a complaint session. Many traditions over-stress entry (get baptized) and under-stress continuous/providential (daily proving), or vice versa. Whatever the class names, ask: what would it look like to recover it? Keep constructive.
-Q2: The practical heart. 1 Cor 11:28 examines FOR: unconfessed sin, division with a brother (the Corinth context!), an unforgiving heart (Matt 6), treating the holy casually. NOT morbid “am I good enough” — that’s the scoreboard Week 4 removed. It’s “am I coming in faith and love, or in pretense and grudge?” Model it briefly.
+Q1: A gentle mirror on the congregation </a:t>
+            </a:r>
+            <a:r>
+              <a:rPr lang="en-US"/>
+              <a:t>→ </a:t>
+            </a:r>
+            <a:r>
+              <a:rPr lang="en-US" dirty="0"/>
+              <a:t>not a complaint session. Many traditions over-stress entry (get baptized) and under-stress continuous/providential (daily proving), or vice versa. Whatever the class names, ask: what would it look like to recover it? Keep constructive.
+Q2: The practical heart. 1 Cor 11:28 examines FOR: unconfessed sin, division with a brother (the Corinth context!), an unforgiving heart (Matt 6), treating the holy casually. NOT morbid “am I good enough” </a:t>
+            </a:r>
+            <a:r>
+              <a:rPr lang="en-US"/>
+              <a:t>→</a:t>
+            </a:r>
+            <a:r>
+              <a:rPr lang="en-US" dirty="0"/>
+              <a:t> that’s the scoreboard Week 4 removed. It’s “am I coming in faith and love, or in pretense and grudge?” Model it briefly.
 [CLICK] Ground rule.</a:t>
             </a:r>
-            <a:endParaRPr lang="en-US" dirty="0"/>
           </a:p>
         </p:txBody>
       </p:sp>
@@ -1037,6 +1062,13 @@
           </p:nvPr>
         </p:nvSpPr>
         <p:spPr/>
+        <p:txBody>
+          <a:bodyPr/>
+          <a:lstStyle/>
+          <a:p>
+            <a:endParaRPr lang="en-US"/>
+          </a:p>
+        </p:txBody>
       </p:sp>
       <p:sp>
         <p:nvSpPr>
@@ -1056,12 +1088,35 @@
             <a:r>
               <a:rPr lang="en-US" dirty="0"/>
               <a:t>[55:00 close, ~2 min]
-[CLICK] Next week’s reading — pivots to the living sacrifice; both flags (body-and-mind, the governor test) preview W9.
+[CLICK] Next week’s reading </a:t>
+            </a:r>
+            <a:r>
+              <a:rPr lang="en-US"/>
+              <a:t>→ </a:t>
+            </a:r>
+            <a:r>
+              <a:rPr lang="en-US" dirty="0"/>
+              <a:t>pivots to the living sacrifice; both flags (body-and-mind, the governor test) preview W9.
 [CLICK] Preview Week 9.
-[CLICK] Carry sentence — the four categories in one line; say it together.
-[CLICK] Close on 2 Cor 13:5 — an invitation to self-examine, framed by grace not fear. Dismiss on time.</a:t>
-            </a:r>
-            <a:endParaRPr lang="en-US" dirty="0"/>
+[CLICK] Carry sentence </a:t>
+            </a:r>
+            <a:r>
+              <a:rPr lang="en-US"/>
+              <a:t>→ </a:t>
+            </a:r>
+            <a:r>
+              <a:rPr lang="en-US" dirty="0"/>
+              <a:t>the four categories in one line; say it together.
+[CLICK] Close on 2 Cor 13:5 </a:t>
+            </a:r>
+            <a:r>
+              <a:rPr lang="en-US"/>
+              <a:t>→</a:t>
+            </a:r>
+            <a:r>
+              <a:rPr lang="en-US" dirty="0"/>
+              <a:t> an invitation to self-examine, framed by grace not fear. Dismiss on time.</a:t>
+            </a:r>
           </a:p>
         </p:txBody>
       </p:sp>
@@ -1134,6 +1189,11 @@
 <file path=ppt/slideMasters/slideMaster1.xml><?xml version="1.0" encoding="utf-8"?>
 <p:sldMaster xmlns:a="http://schemas.openxmlformats.org/drawingml/2006/main" xmlns:r="http://schemas.openxmlformats.org/officeDocument/2006/relationships" xmlns:p="http://schemas.openxmlformats.org/presentationml/2006/main">
   <p:cSld>
+    <p:bg>
+      <p:bgRef idx="1001">
+        <a:schemeClr val="bg1"/>
+      </p:bgRef>
+    </p:bg>
     <p:spTree>
       <p:nvGrpSpPr>
         <p:cNvPr id="1" name=""/>
@@ -1446,7 +1506,7 @@
           <a:bodyPr wrap="square" lIns="0" tIns="0" rIns="0" bIns="0" rtlCol="0" anchor="t"/>
           <a:lstStyle/>
           <a:p>
-            <a:pPr algn="ctr" indent="0" marL="0">
+            <a:pPr marL="0" indent="0" algn="ctr">
               <a:buNone/>
             </a:pPr>
             <a:r>
@@ -1458,7 +1518,7 @@
                 <a:ea typeface="Arial" pitchFamily="34" charset="-122"/>
                 <a:cs typeface="Arial" pitchFamily="34" charset="-120"/>
               </a:rPr>
-              <a:t>The Obedience of Faith — Week 8  ·  Unit III: Testing</a:t>
+              <a:t>The Obedience of Faith - Week 8  ·  Unit III: Testing</a:t>
             </a:r>
             <a:endParaRPr lang="en-US" sz="1600" dirty="0"/>
           </a:p>
@@ -1485,7 +1545,7 @@
           <a:bodyPr wrap="square" lIns="0" tIns="0" rIns="0" bIns="0" rtlCol="0" anchor="t"/>
           <a:lstStyle/>
           <a:p>
-            <a:pPr algn="ctr" indent="0" marL="0">
+            <a:pPr marL="0" indent="0" algn="ctr">
               <a:buNone/>
             </a:pPr>
             <a:r>
@@ -1524,7 +1584,7 @@
           <a:bodyPr wrap="square" lIns="0" tIns="0" rIns="0" bIns="0" rtlCol="0" anchor="t"/>
           <a:lstStyle/>
           <a:p>
-            <a:pPr algn="ctr" indent="0" marL="0">
+            <a:pPr marL="0" indent="0" algn="ctr">
               <a:buNone/>
             </a:pPr>
             <a:r>
@@ -1563,11 +1623,11 @@
           <a:bodyPr wrap="square" lIns="0" tIns="0" rIns="0" bIns="0" rtlCol="0" anchor="t"/>
           <a:lstStyle/>
           <a:p>
-            <a:pPr algn="ctr" indent="0" marL="0">
+            <a:pPr marL="0" indent="0" algn="ctr">
               <a:buNone/>
             </a:pPr>
             <a:r>
-              <a:rPr lang="en-US" sz="2000" i="1" dirty="0">
+              <a:rPr lang="en-US" sz="2800" i="1" dirty="0">
                 <a:solidFill>
                   <a:srgbClr val="000000"/>
                 </a:solidFill>
@@ -1577,17 +1637,14 @@
               </a:rPr>
               <a:t>“For this reason also I wrote you: to test you to see if you are obedient in everything.”</a:t>
             </a:r>
-            <a:pPr algn="ctr" indent="0" marL="0">
+            <a:endParaRPr lang="en-US" sz="2000" dirty="0"/>
+          </a:p>
+          <a:p>
+            <a:pPr marL="0" indent="0" algn="ctr">
               <a:buNone/>
             </a:pPr>
-            <a:endParaRPr lang="en-US" sz="1600" dirty="0"/>
-          </a:p>
-          <a:p>
-            <a:pPr algn="ctr" indent="0" marL="0">
-              <a:buNone/>
-            </a:pPr>
-            <a:r>
-              <a:rPr lang="en-US" sz="1800" dirty="0">
+            <a:r>
+              <a:rPr lang="en-US" sz="2400" dirty="0">
                 <a:solidFill>
                   <a:srgbClr val="000000"/>
                 </a:solidFill>
@@ -1597,7 +1654,7 @@
               </a:rPr>
               <a:t>(2 Corinthians 2:9)</a:t>
             </a:r>
-            <a:endParaRPr lang="en-US" sz="1600" dirty="0"/>
+            <a:endParaRPr lang="en-US" sz="2000" dirty="0"/>
           </a:p>
         </p:txBody>
       </p:sp>
@@ -1622,18 +1679,18 @@
           <a:bodyPr wrap="square" lIns="0" tIns="0" rIns="0" bIns="0" rtlCol="0" anchor="t"/>
           <a:lstStyle/>
           <a:p>
-            <a:pPr algn="ctr" indent="0" marL="0">
+            <a:pPr marL="0" indent="0" algn="ctr">
               <a:buNone/>
             </a:pPr>
             <a:r>
-              <a:rPr lang="en-US" sz="1600" b="1" u="sng" dirty="0">
+              <a:rPr lang="en-US" sz="2000" b="1" u="sng" dirty="0">
                 <a:solidFill>
                   <a:srgbClr val="4F81BD"/>
                 </a:solidFill>
                 <a:latin typeface="Arial" pitchFamily="34" charset="0"/>
                 <a:ea typeface="Arial" pitchFamily="34" charset="-122"/>
                 <a:cs typeface="Arial" pitchFamily="34" charset="-120"/>
-                <a:hlinkClick r:id="rId1" invalidUrl="" action="" tgtFrame="" tooltip="" history="1" highlightClick="0" endSnd="0">
+                <a:hlinkClick r:id="rId3">
                   <a:extLst>
                     <a:ext uri="{A12FA001-AC4F-418D-AE19-62706E023703}">
                       <ahyp:hlinkClr xmlns:ahyp="http://schemas.microsoft.com/office/drawing/2018/hyperlinkcolor" val="tx"/>
@@ -1641,9 +1698,38 @@
                   </a:extLst>
                 </a:hlinkClick>
               </a:rPr>
-              <a:t>https://tinyurl.com/TeachTheWord</a:t>
-            </a:r>
-            <a:endParaRPr lang="en-US" sz="1600" dirty="0"/>
+              <a:t>https://</a:t>
+            </a:r>
+            <a:r>
+              <a:rPr lang="en-US" sz="2000" b="1" u="sng" dirty="0" err="1">
+                <a:solidFill>
+                  <a:srgbClr val="4F81BD"/>
+                </a:solidFill>
+                <a:latin typeface="Arial" pitchFamily="34" charset="0"/>
+                <a:ea typeface="Arial" pitchFamily="34" charset="-122"/>
+                <a:cs typeface="Arial" pitchFamily="34" charset="-120"/>
+                <a:hlinkClick r:id="rId3">
+                  <a:extLst>
+                    <a:ext uri="{A12FA001-AC4F-418D-AE19-62706E023703}">
+                      <ahyp:hlinkClr xmlns:ahyp="http://schemas.microsoft.com/office/drawing/2018/hyperlinkcolor" val="tx"/>
+                    </a:ext>
+                  </a:extLst>
+                </a:hlinkClick>
+              </a:rPr>
+              <a:t>TeachTheWord</a:t>
+            </a:r>
+            <a:r>
+              <a:rPr lang="en-US" sz="2000" b="1" u="sng" dirty="0" err="1">
+                <a:solidFill>
+                  <a:srgbClr val="4F81BD"/>
+                </a:solidFill>
+                <a:latin typeface="Arial" pitchFamily="34" charset="0"/>
+                <a:ea typeface="Arial" pitchFamily="34" charset="-122"/>
+                <a:cs typeface="Arial" pitchFamily="34" charset="-120"/>
+              </a:rPr>
+              <a:t>.Church</a:t>
+            </a:r>
+            <a:endParaRPr lang="en-US" sz="2000" dirty="0"/>
           </a:p>
         </p:txBody>
       </p:sp>
@@ -1693,7 +1779,7 @@
           <a:bodyPr wrap="square" lIns="0" tIns="0" rIns="0" bIns="0" rtlCol="0" anchor="t"/>
           <a:lstStyle/>
           <a:p>
-            <a:pPr algn="l" indent="0" marL="0">
+            <a:pPr marL="0" indent="0" algn="l">
               <a:buNone/>
             </a:pPr>
             <a:r>
@@ -1732,11 +1818,11 @@
           <a:bodyPr wrap="square" lIns="0" tIns="0" rIns="0" bIns="0" rtlCol="0" anchor="t"/>
           <a:lstStyle/>
           <a:p>
-            <a:pPr algn="l" indent="0" marL="0">
+            <a:pPr marL="0" indent="0" algn="l">
               <a:buNone/>
             </a:pPr>
             <a:r>
-              <a:rPr lang="en-US" sz="1300" b="1" dirty="0">
+              <a:rPr lang="en-US" sz="2000" b="1" dirty="0">
                 <a:solidFill>
                   <a:srgbClr val="4F81BD"/>
                 </a:solidFill>
@@ -1746,7 +1832,7 @@
               </a:rPr>
               <a:t>The bridge from covenant tests to church tests</a:t>
             </a:r>
-            <a:endParaRPr lang="en-US" sz="1600" dirty="0"/>
+            <a:endParaRPr lang="en-US" sz="2800" dirty="0"/>
           </a:p>
         </p:txBody>
       </p:sp>
@@ -1759,7 +1845,7 @@
         <p:spPr>
           <a:xfrm>
             <a:off x="365760" y="1051560"/>
-            <a:ext cx="8412480" cy="1188720"/>
+            <a:ext cx="8412480" cy="1417320"/>
           </a:xfrm>
           <a:prstGeom prst="rect">
             <a:avLst/>
@@ -1771,11 +1857,11 @@
           <a:bodyPr wrap="square" lIns="0" tIns="0" rIns="0" bIns="0" rtlCol="0" anchor="t"/>
           <a:lstStyle/>
           <a:p>
-            <a:pPr algn="l" indent="0" marL="0">
+            <a:pPr marL="0" indent="0" algn="l">
               <a:buNone/>
             </a:pPr>
             <a:r>
-              <a:rPr lang="en-US" sz="1450" b="1" dirty="0">
+              <a:rPr lang="en-US" b="1" dirty="0">
                 <a:solidFill>
                   <a:srgbClr val="1F497D"/>
                 </a:solidFill>
@@ -1786,11 +1872,8 @@
               <a:t>The New Testament speaks of the gospel not only as believed, but as obeyed:
 </a:t>
             </a:r>
-            <a:pPr algn="l" indent="0" marL="0">
-              <a:buNone/>
-            </a:pPr>
-            <a:r>
-              <a:rPr lang="en-US" sz="1350" i="1" dirty="0">
+            <a:r>
+              <a:rPr lang="en-US" sz="1600" i="1" dirty="0">
                 <a:solidFill>
                   <a:srgbClr val="000000"/>
                 </a:solidFill>
@@ -1799,38 +1882,10 @@
                 <a:cs typeface="Arial" pitchFamily="34" charset="-120"/>
               </a:rPr>
               <a:t>▪  “…those who do not obey the gospel of our Lord Jesus” (2 Thess 1:8)
-</a:t>
-            </a:r>
-            <a:pPr algn="l" indent="0" marL="0">
-              <a:buNone/>
-            </a:pPr>
-            <a:r>
-              <a:rPr lang="en-US" sz="1350" i="1" dirty="0">
-                <a:solidFill>
-                  <a:srgbClr val="000000"/>
-                </a:solidFill>
-                <a:latin typeface="Arial" pitchFamily="34" charset="0"/>
-                <a:ea typeface="Arial" pitchFamily="34" charset="-122"/>
-                <a:cs typeface="Arial" pitchFamily="34" charset="-120"/>
-              </a:rPr>
-              <a:t>▪  “What will be the fate of those disobedient to the gospel of God?” (1 Pet 4:17)
-</a:t>
-            </a:r>
-            <a:pPr algn="l" indent="0" marL="0">
-              <a:buNone/>
-            </a:pPr>
-            <a:r>
-              <a:rPr lang="en-US" sz="1350" i="1" dirty="0">
-                <a:solidFill>
-                  <a:srgbClr val="000000"/>
-                </a:solidFill>
-                <a:latin typeface="Arial" pitchFamily="34" charset="0"/>
-                <a:ea typeface="Arial" pitchFamily="34" charset="-122"/>
-                <a:cs typeface="Arial" pitchFamily="34" charset="-120"/>
-              </a:rPr>
-              <a:t>▪  “you obeyed from the heart that pattern of teaching” (Rom 6:17)</a:t>
-            </a:r>
-            <a:endParaRPr lang="en-US" sz="1600" dirty="0"/>
+▪  “What will be the fate of those disobedient to the gospel of God?” (1 Pet 4:17)
+▪  “you obeyed from the heart that pattern of teaching” (Rom 6:17)</a:t>
+            </a:r>
+            <a:endParaRPr lang="en-US" sz="2000" dirty="0"/>
           </a:p>
         </p:txBody>
       </p:sp>
@@ -1842,7 +1897,7 @@
         </p:nvSpPr>
         <p:spPr>
           <a:xfrm>
-            <a:off x="365760" y="2606040"/>
+            <a:off x="365760" y="2697480"/>
             <a:ext cx="8412480" cy="914400"/>
           </a:xfrm>
           <a:prstGeom prst="rect">
@@ -1855,11 +1910,11 @@
           <a:bodyPr wrap="square" lIns="0" tIns="0" rIns="0" bIns="0" rtlCol="0" anchor="t"/>
           <a:lstStyle/>
           <a:p>
-            <a:pPr algn="l" indent="0" marL="0">
+            <a:pPr marL="0" indent="0" algn="l">
               <a:buNone/>
             </a:pPr>
             <a:r>
-              <a:rPr lang="en-US" sz="1500" b="1" dirty="0">
+              <a:rPr lang="en-US" b="1" dirty="0">
                 <a:solidFill>
                   <a:srgbClr val="1F497D"/>
                 </a:solidFill>
@@ -1869,11 +1924,8 @@
               </a:rPr>
               <a:t>A gospel can be obeyed only because it contains commands. </a:t>
             </a:r>
-            <a:pPr algn="l" indent="0" marL="0">
-              <a:buNone/>
-            </a:pPr>
-            <a:r>
-              <a:rPr lang="en-US" sz="1450" dirty="0">
+            <a:r>
+              <a:rPr lang="en-US" dirty="0">
                 <a:solidFill>
                   <a:srgbClr val="000000"/>
                 </a:solidFill>
@@ -1883,7 +1935,7 @@
               </a:rPr>
               <a:t>And a command is, by nature, a test — the point where trust in the word must become action.</a:t>
             </a:r>
-            <a:endParaRPr lang="en-US" sz="1600" dirty="0"/>
+            <a:endParaRPr lang="en-US" sz="2000" dirty="0"/>
           </a:p>
         </p:txBody>
       </p:sp>
@@ -1895,7 +1947,7 @@
         </p:nvSpPr>
         <p:spPr>
           <a:xfrm>
-            <a:off x="365760" y="3611880"/>
+            <a:off x="365760" y="3840480"/>
             <a:ext cx="8412480" cy="1051560"/>
           </a:xfrm>
           <a:prstGeom prst="rect">
@@ -1908,11 +1960,11 @@
           <a:bodyPr wrap="square" lIns="0" tIns="0" rIns="0" bIns="0" rtlCol="0" anchor="t"/>
           <a:lstStyle/>
           <a:p>
-            <a:pPr algn="l" indent="0" marL="0">
+            <a:pPr marL="0" indent="0" algn="l">
               <a:buNone/>
             </a:pPr>
             <a:r>
-              <a:rPr lang="en-US" sz="1400" dirty="0">
+              <a:rPr lang="en-US" dirty="0">
                 <a:solidFill>
                   <a:srgbClr val="000000"/>
                 </a:solidFill>
@@ -1920,14 +1972,33 @@
                 <a:ea typeface="Arial" pitchFamily="34" charset="-122"/>
                 <a:cs typeface="Arial" pitchFamily="34" charset="-120"/>
               </a:rPr>
-              <a:t>Paul states it as bluntly as possible — apostolic instruction is designed to test:
+              <a:t>Paul states it as bluntly as possible </a:t>
+            </a:r>
+            <a:r>
+              <a:rPr lang="en-US">
+                <a:solidFill>
+                  <a:srgbClr val="000000"/>
+                </a:solidFill>
+                <a:latin typeface="Arial" pitchFamily="34" charset="0"/>
+                <a:ea typeface="Arial" pitchFamily="34" charset="-122"/>
+                <a:cs typeface="Arial" pitchFamily="34" charset="-120"/>
+              </a:rPr>
+              <a:t>→</a:t>
+            </a:r>
+            <a:r>
+              <a:rPr lang="en-US" dirty="0">
+                <a:solidFill>
+                  <a:srgbClr val="000000"/>
+                </a:solidFill>
+                <a:latin typeface="Arial" pitchFamily="34" charset="0"/>
+                <a:ea typeface="Arial" pitchFamily="34" charset="-122"/>
+                <a:cs typeface="Arial" pitchFamily="34" charset="-120"/>
+              </a:rPr>
+              <a:t> apostolic instruction is designed to test:
 </a:t>
             </a:r>
-            <a:pPr algn="l" indent="0" marL="0">
-              <a:buNone/>
-            </a:pPr>
-            <a:r>
-              <a:rPr lang="en-US" sz="1500" b="1" i="1" dirty="0">
+            <a:r>
+              <a:rPr lang="en-US" b="1" i="1" dirty="0">
                 <a:solidFill>
                   <a:srgbClr val="000000"/>
                 </a:solidFill>
@@ -1937,11 +2008,8 @@
               </a:rPr>
               <a:t>“For this reason also I wrote you: to test you to see if you are obedient in everything.” </a:t>
             </a:r>
-            <a:pPr algn="l" indent="0" marL="0">
-              <a:buNone/>
-            </a:pPr>
-            <a:r>
-              <a:rPr lang="en-US" sz="1400" b="1" dirty="0">
+            <a:r>
+              <a:rPr lang="en-US" b="1" dirty="0">
                 <a:solidFill>
                   <a:srgbClr val="000000"/>
                 </a:solidFill>
@@ -1951,7 +2019,7 @@
               </a:rPr>
               <a:t>(2 Corinthians 2:9)</a:t>
             </a:r>
-            <a:endParaRPr lang="en-US" sz="1600" dirty="0"/>
+            <a:endParaRPr lang="en-US" sz="2000" dirty="0"/>
           </a:p>
         </p:txBody>
       </p:sp>
@@ -1963,7 +2031,7 @@
         </p:nvSpPr>
         <p:spPr>
           <a:xfrm>
-            <a:off x="365760" y="4800600"/>
+            <a:off x="365760" y="5120640"/>
             <a:ext cx="8412480" cy="1371600"/>
           </a:xfrm>
           <a:prstGeom prst="rect">
@@ -1976,11 +2044,11 @@
           <a:bodyPr wrap="square" lIns="0" tIns="0" rIns="0" bIns="0" rtlCol="0" anchor="t"/>
           <a:lstStyle/>
           <a:p>
-            <a:pPr algn="l" indent="0" marL="0">
+            <a:pPr marL="0" indent="0" algn="l">
               <a:buNone/>
             </a:pPr>
             <a:r>
-              <a:rPr lang="en-US" sz="1450" b="1" dirty="0">
+              <a:rPr lang="en-US" b="1" dirty="0">
                 <a:solidFill>
                   <a:srgbClr val="1F497D"/>
                 </a:solidFill>
@@ -1990,25 +2058,69 @@
               </a:rPr>
               <a:t>Which closes Romans’ loop from Week 1: </a:t>
             </a:r>
-            <a:pPr algn="l" indent="0" marL="0">
+            <a:r>
+              <a:rPr lang="en-US" dirty="0">
+                <a:solidFill>
+                  <a:srgbClr val="000000"/>
+                </a:solidFill>
+                <a:latin typeface="Arial" pitchFamily="34" charset="0"/>
+                <a:ea typeface="Arial" pitchFamily="34" charset="-122"/>
+                <a:cs typeface="Arial" pitchFamily="34" charset="-120"/>
+              </a:rPr>
+              <a:t>the whole apostleship exists “to bring about the </a:t>
+            </a:r>
+            <a:r>
+              <a:rPr lang="en-US" b="1" i="1" dirty="0">
+                <a:solidFill>
+                  <a:srgbClr val="1F497D"/>
+                </a:solidFill>
+                <a:latin typeface="Arial" pitchFamily="34" charset="0"/>
+                <a:ea typeface="Arial" pitchFamily="34" charset="-122"/>
+                <a:cs typeface="Arial" pitchFamily="34" charset="-120"/>
+              </a:rPr>
+              <a:t>obedience of faith</a:t>
+            </a:r>
+            <a:r>
+              <a:rPr lang="en-US" dirty="0">
+                <a:solidFill>
+                  <a:srgbClr val="000000"/>
+                </a:solidFill>
+                <a:latin typeface="Arial" pitchFamily="34" charset="0"/>
+                <a:ea typeface="Arial" pitchFamily="34" charset="-122"/>
+                <a:cs typeface="Arial" pitchFamily="34" charset="-120"/>
+              </a:rPr>
+              <a:t>” (Rom 1:5). So, the church’s tests fall into four kinds </a:t>
+            </a:r>
+            <a:r>
+              <a:rPr lang="en-US">
+                <a:solidFill>
+                  <a:srgbClr val="000000"/>
+                </a:solidFill>
+                <a:latin typeface="Arial" pitchFamily="34" charset="0"/>
+                <a:ea typeface="Arial" pitchFamily="34" charset="-122"/>
+                <a:cs typeface="Arial" pitchFamily="34" charset="-120"/>
+              </a:rPr>
+              <a:t>→</a:t>
+            </a:r>
+            <a:r>
+              <a:rPr lang="en-US" dirty="0">
+                <a:solidFill>
+                  <a:srgbClr val="000000"/>
+                </a:solidFill>
+                <a:latin typeface="Arial" pitchFamily="34" charset="0"/>
+                <a:ea typeface="Arial" pitchFamily="34" charset="-122"/>
+                <a:cs typeface="Arial" pitchFamily="34" charset="-120"/>
+              </a:rPr>
+              <a:t> which we’ll walk today.</a:t>
+            </a:r>
+            <a:endParaRPr lang="en-US" sz="2000" dirty="0"/>
+          </a:p>
+          <a:p>
+            <a:pPr marL="0" indent="0" algn="l">
               <a:buNone/>
             </a:pPr>
             <a:r>
-              <a:rPr lang="en-US" sz="1450" dirty="0">
-                <a:solidFill>
-                  <a:srgbClr val="000000"/>
-                </a:solidFill>
-                <a:latin typeface="Arial" pitchFamily="34" charset="0"/>
-                <a:ea typeface="Arial" pitchFamily="34" charset="-122"/>
-                <a:cs typeface="Arial" pitchFamily="34" charset="-120"/>
-              </a:rPr>
-              <a:t>the whole apostleship exists “to bring about the </a:t>
-            </a:r>
-            <a:pPr algn="l" indent="0" marL="0">
-              <a:buNone/>
-            </a:pPr>
-            <a:r>
-              <a:rPr lang="en-US" sz="1450" b="1" i="1" dirty="0">
+              <a:rPr lang="en-US" b="1" dirty="0">
                 <a:solidFill>
                   <a:srgbClr val="1F497D"/>
                 </a:solidFill>
@@ -2016,43 +2128,9 @@
                 <a:ea typeface="Arial" pitchFamily="34" charset="-122"/>
                 <a:cs typeface="Arial" pitchFamily="34" charset="-120"/>
               </a:rPr>
-              <a:t>obedience of faith</a:t>
-            </a:r>
-            <a:pPr algn="l" indent="0" marL="0">
-              <a:buNone/>
-            </a:pPr>
-            <a:r>
-              <a:rPr lang="en-US" sz="1450" dirty="0">
-                <a:solidFill>
-                  <a:srgbClr val="000000"/>
-                </a:solidFill>
-                <a:latin typeface="Arial" pitchFamily="34" charset="0"/>
-                <a:ea typeface="Arial" pitchFamily="34" charset="-122"/>
-                <a:cs typeface="Arial" pitchFamily="34" charset="-120"/>
-              </a:rPr>
-              <a:t>” (Rom 1:5). So the church’s tests fall into four kinds — which we’ll walk today.</a:t>
-            </a:r>
-            <a:pPr algn="l" indent="0" marL="0">
-              <a:buNone/>
-            </a:pPr>
-            <a:endParaRPr lang="en-US" sz="1600" dirty="0"/>
-          </a:p>
-          <a:p>
-            <a:pPr algn="l" indent="0" marL="0">
-              <a:buNone/>
-            </a:pPr>
-            <a:r>
-              <a:rPr lang="en-US" sz="1500" b="1" dirty="0">
-                <a:solidFill>
-                  <a:srgbClr val="1F497D"/>
-                </a:solidFill>
-                <a:latin typeface="Arial" pitchFamily="34" charset="0"/>
-                <a:ea typeface="Arial" pitchFamily="34" charset="-122"/>
-                <a:cs typeface="Arial" pitchFamily="34" charset="-120"/>
-              </a:rPr>
               <a:t>     ENTRY  ·  RECURRING  ·  CONTINUOUS  ·  PROVIDENTIAL</a:t>
             </a:r>
-            <a:endParaRPr lang="en-US" sz="1600" dirty="0"/>
+            <a:endParaRPr lang="en-US" sz="2000" dirty="0"/>
           </a:p>
         </p:txBody>
       </p:sp>
@@ -2070,26 +2148,26 @@
               <p:cTn id="2" dur="indefinite" nodeType="mainSeq">
                 <p:childTnLst>
                   <p:par>
-                    <p:cTn id="7" fill="hold">
+                    <p:cTn id="3" fill="hold">
                       <p:stCondLst>
                         <p:cond delay="indefinite"/>
                       </p:stCondLst>
                       <p:childTnLst>
                         <p:par>
-                          <p:cTn id="8" fill="hold">
+                          <p:cTn id="4" fill="hold">
                             <p:stCondLst>
                               <p:cond delay="0"/>
                             </p:stCondLst>
                             <p:childTnLst>
                               <p:par>
-                                <p:cTn id="3" presetID="42" presetClass="entr" presetSubtype="0" fill="hold" grpId="0" nodeType="clickEffect">
+                                <p:cTn id="5" presetID="42" presetClass="entr" presetSubtype="0" fill="hold" nodeType="clickEffect">
                                   <p:stCondLst>
                                     <p:cond delay="0"/>
                                   </p:stCondLst>
                                   <p:childTnLst>
                                     <p:set>
                                       <p:cBhvr>
-                                        <p:cTn id="4" dur="1" fill="hold">
+                                        <p:cTn id="6" dur="1" fill="hold">
                                           <p:stCondLst>
                                             <p:cond delay="0"/>
                                           </p:stCondLst>
@@ -2107,7 +2185,7 @@
                                     </p:set>
                                     <p:animEffect transition="in" filter="fade">
                                       <p:cBhvr>
-                                        <p:cTn id="5" dur="1000"/>
+                                        <p:cTn id="7" dur="1000"/>
                                         <p:tgtEl>
                                           <p:spTgt spid="4"/>
                                         </p:tgtEl>
@@ -2115,7 +2193,7 @@
                                     </p:animEffect>
                                     <p:anim calcmode="lin" valueType="num">
                                       <p:cBhvr>
-                                        <p:cTn id="6" dur="1000" fill="hold"/>
+                                        <p:cTn id="8" dur="1000" fill="hold"/>
                                         <p:tgtEl>
                                           <p:spTgt spid="4"/>
                                         </p:tgtEl>
@@ -2146,26 +2224,26 @@
                     </p:cTn>
                   </p:par>
                   <p:par>
-                    <p:cTn id="13" fill="hold">
+                    <p:cTn id="9" fill="hold">
                       <p:stCondLst>
                         <p:cond delay="indefinite"/>
                       </p:stCondLst>
                       <p:childTnLst>
                         <p:par>
-                          <p:cTn id="14" fill="hold">
+                          <p:cTn id="10" fill="hold">
                             <p:stCondLst>
                               <p:cond delay="0"/>
                             </p:stCondLst>
                             <p:childTnLst>
                               <p:par>
-                                <p:cTn id="9" presetID="42" presetClass="entr" presetSubtype="0" fill="hold" grpId="0" nodeType="clickEffect">
+                                <p:cTn id="11" presetID="42" presetClass="entr" presetSubtype="0" fill="hold" nodeType="clickEffect">
                                   <p:stCondLst>
                                     <p:cond delay="0"/>
                                   </p:stCondLst>
                                   <p:childTnLst>
                                     <p:set>
                                       <p:cBhvr>
-                                        <p:cTn id="10" dur="1" fill="hold">
+                                        <p:cTn id="12" dur="1" fill="hold">
                                           <p:stCondLst>
                                             <p:cond delay="0"/>
                                           </p:stCondLst>
@@ -2183,7 +2261,7 @@
                                     </p:set>
                                     <p:animEffect transition="in" filter="fade">
                                       <p:cBhvr>
-                                        <p:cTn id="11" dur="1000"/>
+                                        <p:cTn id="13" dur="1000"/>
                                         <p:tgtEl>
                                           <p:spTgt spid="5"/>
                                         </p:tgtEl>
@@ -2191,7 +2269,7 @@
                                     </p:animEffect>
                                     <p:anim calcmode="lin" valueType="num">
                                       <p:cBhvr>
-                                        <p:cTn id="12" dur="1000" fill="hold"/>
+                                        <p:cTn id="14" dur="1000" fill="hold"/>
                                         <p:tgtEl>
                                           <p:spTgt spid="5"/>
                                         </p:tgtEl>
@@ -2222,26 +2300,26 @@
                     </p:cTn>
                   </p:par>
                   <p:par>
-                    <p:cTn id="19" fill="hold">
+                    <p:cTn id="15" fill="hold">
                       <p:stCondLst>
                         <p:cond delay="indefinite"/>
                       </p:stCondLst>
                       <p:childTnLst>
                         <p:par>
-                          <p:cTn id="20" fill="hold">
+                          <p:cTn id="16" fill="hold">
                             <p:stCondLst>
                               <p:cond delay="0"/>
                             </p:stCondLst>
                             <p:childTnLst>
                               <p:par>
-                                <p:cTn id="15" presetID="42" presetClass="entr" presetSubtype="0" fill="hold" grpId="0" nodeType="clickEffect">
+                                <p:cTn id="17" presetID="42" presetClass="entr" presetSubtype="0" fill="hold" nodeType="clickEffect">
                                   <p:stCondLst>
                                     <p:cond delay="0"/>
                                   </p:stCondLst>
                                   <p:childTnLst>
                                     <p:set>
                                       <p:cBhvr>
-                                        <p:cTn id="16" dur="1" fill="hold">
+                                        <p:cTn id="18" dur="1" fill="hold">
                                           <p:stCondLst>
                                             <p:cond delay="0"/>
                                           </p:stCondLst>
@@ -2259,7 +2337,7 @@
                                     </p:set>
                                     <p:animEffect transition="in" filter="fade">
                                       <p:cBhvr>
-                                        <p:cTn id="17" dur="1000"/>
+                                        <p:cTn id="19" dur="1000"/>
                                         <p:tgtEl>
                                           <p:spTgt spid="6"/>
                                         </p:tgtEl>
@@ -2267,7 +2345,7 @@
                                     </p:animEffect>
                                     <p:anim calcmode="lin" valueType="num">
                                       <p:cBhvr>
-                                        <p:cTn id="18" dur="1000" fill="hold"/>
+                                        <p:cTn id="20" dur="1000" fill="hold"/>
                                         <p:tgtEl>
                                           <p:spTgt spid="6"/>
                                         </p:tgtEl>
@@ -2298,26 +2376,26 @@
                     </p:cTn>
                   </p:par>
                   <p:par>
-                    <p:cTn id="25" fill="hold">
+                    <p:cTn id="21" fill="hold">
                       <p:stCondLst>
                         <p:cond delay="indefinite"/>
                       </p:stCondLst>
                       <p:childTnLst>
                         <p:par>
-                          <p:cTn id="26" fill="hold">
+                          <p:cTn id="22" fill="hold">
                             <p:stCondLst>
                               <p:cond delay="0"/>
                             </p:stCondLst>
                             <p:childTnLst>
                               <p:par>
-                                <p:cTn id="21" presetID="42" presetClass="entr" presetSubtype="0" fill="hold" grpId="0" nodeType="clickEffect">
+                                <p:cTn id="23" presetID="42" presetClass="entr" presetSubtype="0" fill="hold" nodeType="clickEffect">
                                   <p:stCondLst>
                                     <p:cond delay="0"/>
                                   </p:stCondLst>
                                   <p:childTnLst>
                                     <p:set>
                                       <p:cBhvr>
-                                        <p:cTn id="22" dur="1" fill="hold">
+                                        <p:cTn id="24" dur="1" fill="hold">
                                           <p:stCondLst>
                                             <p:cond delay="0"/>
                                           </p:stCondLst>
@@ -2335,7 +2413,7 @@
                                     </p:set>
                                     <p:animEffect transition="in" filter="fade">
                                       <p:cBhvr>
-                                        <p:cTn id="23" dur="1000"/>
+                                        <p:cTn id="25" dur="1000"/>
                                         <p:tgtEl>
                                           <p:spTgt spid="7"/>
                                         </p:tgtEl>
@@ -2343,7 +2421,7 @@
                                     </p:animEffect>
                                     <p:anim calcmode="lin" valueType="num">
                                       <p:cBhvr>
-                                        <p:cTn id="24" dur="1000" fill="hold"/>
+                                        <p:cTn id="26" dur="1000" fill="hold"/>
                                         <p:tgtEl>
                                           <p:spTgt spid="7"/>
                                         </p:tgtEl>
@@ -2417,6 +2495,46 @@
       </p:grpSpPr>
       <p:sp>
         <p:nvSpPr>
+          <p:cNvPr id="8" name="par">
+            <a:extLst>
+              <a:ext uri="{FF2B5EF4-FFF2-40B4-BE49-F238E27FC236}">
+                <a16:creationId xmlns:a16="http://schemas.microsoft.com/office/drawing/2014/main" id="{03CD111D-5F26-7C3C-91EE-DC699F93D26F}"/>
+              </a:ext>
+            </a:extLst>
+          </p:cNvPr>
+          <p:cNvSpPr/>
+          <p:nvPr/>
+        </p:nvSpPr>
+        <p:spPr>
+          <a:xfrm>
+            <a:off x="228600" y="2585273"/>
+            <a:ext cx="8686800" cy="1687453"/>
+          </a:xfrm>
+          <a:prstGeom prst="roundRect">
+            <a:avLst>
+              <a:gd name="adj" fmla="val 5161"/>
+            </a:avLst>
+          </a:prstGeom>
+          <a:solidFill>
+            <a:srgbClr val="F2F4F7"/>
+          </a:solidFill>
+          <a:ln w="12700">
+            <a:solidFill>
+              <a:srgbClr val="1F497D"/>
+            </a:solidFill>
+            <a:prstDash val="solid"/>
+          </a:ln>
+        </p:spPr>
+        <p:txBody>
+          <a:bodyPr/>
+          <a:lstStyle/>
+          <a:p>
+            <a:endParaRPr lang="en-US"/>
+          </a:p>
+        </p:txBody>
+      </p:sp>
+      <p:sp>
+        <p:nvSpPr>
           <p:cNvPr id="2" name="HeadTitle"/>
           <p:cNvSpPr txBox="1"/>
           <p:nvPr/>
@@ -2436,7 +2554,7 @@
           <a:bodyPr wrap="square" lIns="0" tIns="0" rIns="0" bIns="0" rtlCol="0" anchor="t"/>
           <a:lstStyle/>
           <a:p>
-            <a:pPr algn="l" indent="0" marL="0">
+            <a:pPr marL="0" indent="0" algn="l">
               <a:buNone/>
             </a:pPr>
             <a:r>
@@ -2462,7 +2580,7 @@
         </p:nvSpPr>
         <p:spPr>
           <a:xfrm>
-            <a:off x="228600" y="566928"/>
+            <a:off x="228600" y="497299"/>
             <a:ext cx="8686800" cy="320040"/>
           </a:xfrm>
           <a:prstGeom prst="rect">
@@ -2475,11 +2593,11 @@
           <a:bodyPr wrap="square" lIns="0" tIns="0" rIns="0" bIns="0" rtlCol="0" anchor="t"/>
           <a:lstStyle/>
           <a:p>
-            <a:pPr algn="l" indent="0" marL="0">
+            <a:pPr marL="0" indent="0" algn="l">
               <a:buNone/>
             </a:pPr>
             <a:r>
-              <a:rPr lang="en-US" sz="1300" b="1" dirty="0">
+              <a:rPr lang="en-US" sz="2000" b="1" dirty="0">
                 <a:solidFill>
                   <a:srgbClr val="4F81BD"/>
                 </a:solidFill>
@@ -2489,7 +2607,7 @@
               </a:rPr>
               <a:t>Faith confessed · repentance · baptism</a:t>
             </a:r>
-            <a:endParaRPr lang="en-US" sz="1600" dirty="0"/>
+            <a:endParaRPr lang="en-US" sz="2800" dirty="0"/>
           </a:p>
         </p:txBody>
       </p:sp>
@@ -2501,8 +2619,8 @@
         </p:nvSpPr>
         <p:spPr>
           <a:xfrm>
-            <a:off x="365760" y="1005840"/>
-            <a:ext cx="8412480" cy="1234440"/>
+            <a:off x="365760" y="833752"/>
+            <a:ext cx="8412480" cy="1767381"/>
           </a:xfrm>
           <a:prstGeom prst="rect">
             <a:avLst/>
@@ -2514,11 +2632,11 @@
           <a:bodyPr wrap="square" lIns="0" tIns="0" rIns="0" bIns="0" rtlCol="0" anchor="t"/>
           <a:lstStyle/>
           <a:p>
-            <a:pPr algn="l" indent="0" marL="0">
+            <a:pPr marL="0" indent="0" algn="l">
               <a:buNone/>
             </a:pPr>
             <a:r>
-              <a:rPr lang="en-US" sz="1400" b="1" dirty="0">
+              <a:rPr lang="en-US" b="1" dirty="0">
                 <a:solidFill>
                   <a:srgbClr val="1F497D"/>
                 </a:solidFill>
@@ -2529,11 +2647,47 @@
               <a:t>The gospel’s commands at the threshold:
 </a:t>
             </a:r>
-            <a:pPr algn="l" indent="0" marL="0">
+            <a:r>
+              <a:rPr lang="en-US" sz="1600" dirty="0">
+                <a:solidFill>
+                  <a:srgbClr val="000000"/>
+                </a:solidFill>
+                <a:latin typeface="Arial" pitchFamily="34" charset="0"/>
+                <a:ea typeface="Arial" pitchFamily="34" charset="-122"/>
+                <a:cs typeface="Arial" pitchFamily="34" charset="-120"/>
+              </a:rPr>
+              <a:t>•  Confess:  </a:t>
+            </a:r>
+            <a:r>
+              <a:rPr lang="en-US" sz="1600" b="1" i="1" dirty="0">
+                <a:solidFill>
+                  <a:srgbClr val="000000"/>
+                </a:solidFill>
+                <a:latin typeface="Arial" pitchFamily="34" charset="0"/>
+                <a:ea typeface="Arial" pitchFamily="34" charset="-122"/>
+                <a:cs typeface="Arial" pitchFamily="34" charset="-120"/>
+              </a:rPr>
+              <a:t>“if you confess with your mouth that Jesus is Lord… you will be saved” </a:t>
+            </a:r>
+            <a:r>
+              <a:rPr lang="en-US" sz="1600" b="1" dirty="0">
+                <a:solidFill>
+                  <a:srgbClr val="000000"/>
+                </a:solidFill>
+                <a:latin typeface="Arial" pitchFamily="34" charset="0"/>
+                <a:ea typeface="Arial" pitchFamily="34" charset="-122"/>
+                <a:cs typeface="Arial" pitchFamily="34" charset="-120"/>
+              </a:rPr>
+              <a:t>(Rom 10:9)</a:t>
+            </a:r>
+            <a:endParaRPr lang="en-US" sz="2000" dirty="0"/>
+          </a:p>
+          <a:p>
+            <a:pPr marL="0" indent="0" algn="l">
               <a:buNone/>
             </a:pPr>
             <a:r>
-              <a:rPr lang="en-US" sz="1350" dirty="0">
+              <a:rPr lang="en-US" sz="1600" dirty="0">
                 <a:solidFill>
                   <a:srgbClr val="000000"/>
                 </a:solidFill>
@@ -2541,13 +2695,16 @@
                 <a:ea typeface="Arial" pitchFamily="34" charset="-122"/>
                 <a:cs typeface="Arial" pitchFamily="34" charset="-120"/>
               </a:rPr>
-              <a:t>•  Confess:  </a:t>
-            </a:r>
-            <a:pPr algn="l" indent="0" marL="0">
+              <a:t>•  Repent:  </a:t>
+            </a:r>
+            <a:endParaRPr lang="en-US" sz="2000" dirty="0"/>
+          </a:p>
+          <a:p>
+            <a:pPr marL="0" indent="0" algn="l">
               <a:buNone/>
             </a:pPr>
             <a:r>
-              <a:rPr lang="en-US" sz="1300" b="1" i="1" dirty="0">
+              <a:rPr lang="en-US" sz="1600" b="1" i="1" dirty="0">
                 <a:solidFill>
                   <a:srgbClr val="000000"/>
                 </a:solidFill>
@@ -2555,13 +2712,27 @@
                 <a:ea typeface="Arial" pitchFamily="34" charset="-122"/>
                 <a:cs typeface="Arial" pitchFamily="34" charset="-120"/>
               </a:rPr>
-              <a:t>“if you confess with your mouth that Jesus is Lord… you will be saved” </a:t>
-            </a:r>
-            <a:pPr algn="l" indent="0" marL="0">
+              <a:t>“God… now commands all people everywhere to repent” </a:t>
+            </a:r>
+            <a:r>
+              <a:rPr lang="en-US" sz="1600" b="1" dirty="0">
+                <a:solidFill>
+                  <a:srgbClr val="000000"/>
+                </a:solidFill>
+                <a:latin typeface="Arial" pitchFamily="34" charset="0"/>
+                <a:ea typeface="Arial" pitchFamily="34" charset="-122"/>
+                <a:cs typeface="Arial" pitchFamily="34" charset="-120"/>
+              </a:rPr>
+              <a:t>(Acts 17:30)</a:t>
+            </a:r>
+            <a:endParaRPr lang="en-US" sz="2000" dirty="0"/>
+          </a:p>
+          <a:p>
+            <a:pPr marL="0" indent="0" algn="l">
               <a:buNone/>
             </a:pPr>
             <a:r>
-              <a:rPr lang="en-US" sz="1200" b="1" dirty="0">
+              <a:rPr lang="en-US" sz="1600" dirty="0">
                 <a:solidFill>
                   <a:srgbClr val="000000"/>
                 </a:solidFill>
@@ -2569,19 +2740,16 @@
                 <a:ea typeface="Arial" pitchFamily="34" charset="-122"/>
                 <a:cs typeface="Arial" pitchFamily="34" charset="-120"/>
               </a:rPr>
-              <a:t>(Rom 10:9)</a:t>
-            </a:r>
-            <a:pPr algn="l" indent="0" marL="0">
+              <a:t>•  Be baptized:  </a:t>
+            </a:r>
+            <a:endParaRPr lang="en-US" sz="2000" dirty="0"/>
+          </a:p>
+          <a:p>
+            <a:pPr marL="0" indent="0" algn="l">
               <a:buNone/>
             </a:pPr>
-            <a:endParaRPr lang="en-US" sz="1600" dirty="0"/>
-          </a:p>
-          <a:p>
-            <a:pPr algn="l" indent="0" marL="0">
-              <a:buNone/>
-            </a:pPr>
-            <a:r>
-              <a:rPr lang="en-US" sz="1350" dirty="0">
+            <a:r>
+              <a:rPr lang="en-US" sz="1600" b="1" i="1" dirty="0">
                 <a:solidFill>
                   <a:srgbClr val="000000"/>
                 </a:solidFill>
@@ -2589,16 +2757,10 @@
                 <a:ea typeface="Arial" pitchFamily="34" charset="-122"/>
                 <a:cs typeface="Arial" pitchFamily="34" charset="-120"/>
               </a:rPr>
-              <a:t>•  Repent:  </a:t>
-            </a:r>
-            <a:endParaRPr lang="en-US" sz="1600" dirty="0"/>
-          </a:p>
-          <a:p>
-            <a:pPr algn="l" indent="0" marL="0">
-              <a:buNone/>
-            </a:pPr>
-            <a:r>
-              <a:rPr lang="en-US" sz="1300" b="1" i="1" dirty="0">
+              <a:t>“Repent, and each one of you be baptized in the name of Jesus Christ” </a:t>
+            </a:r>
+            <a:r>
+              <a:rPr lang="en-US" sz="1600" b="1" dirty="0">
                 <a:solidFill>
                   <a:srgbClr val="000000"/>
                 </a:solidFill>
@@ -2606,74 +2768,9 @@
                 <a:ea typeface="Arial" pitchFamily="34" charset="-122"/>
                 <a:cs typeface="Arial" pitchFamily="34" charset="-120"/>
               </a:rPr>
-              <a:t>“God… now commands all people everywhere to repent” </a:t>
-            </a:r>
-            <a:pPr algn="l" indent="0" marL="0">
-              <a:buNone/>
-            </a:pPr>
-            <a:r>
-              <a:rPr lang="en-US" sz="1200" b="1" dirty="0">
-                <a:solidFill>
-                  <a:srgbClr val="000000"/>
-                </a:solidFill>
-                <a:latin typeface="Arial" pitchFamily="34" charset="0"/>
-                <a:ea typeface="Arial" pitchFamily="34" charset="-122"/>
-                <a:cs typeface="Arial" pitchFamily="34" charset="-120"/>
-              </a:rPr>
-              <a:t>(Acts 17:30)</a:t>
-            </a:r>
-            <a:pPr algn="l" indent="0" marL="0">
-              <a:buNone/>
-            </a:pPr>
-            <a:endParaRPr lang="en-US" sz="1600" dirty="0"/>
-          </a:p>
-          <a:p>
-            <a:pPr algn="l" indent="0" marL="0">
-              <a:buNone/>
-            </a:pPr>
-            <a:r>
-              <a:rPr lang="en-US" sz="1350" dirty="0">
-                <a:solidFill>
-                  <a:srgbClr val="000000"/>
-                </a:solidFill>
-                <a:latin typeface="Arial" pitchFamily="34" charset="0"/>
-                <a:ea typeface="Arial" pitchFamily="34" charset="-122"/>
-                <a:cs typeface="Arial" pitchFamily="34" charset="-120"/>
-              </a:rPr>
-              <a:t>•  Be baptized:  </a:t>
-            </a:r>
-            <a:endParaRPr lang="en-US" sz="1600" dirty="0"/>
-          </a:p>
-          <a:p>
-            <a:pPr algn="l" indent="0" marL="0">
-              <a:buNone/>
-            </a:pPr>
-            <a:r>
-              <a:rPr lang="en-US" sz="1300" b="1" i="1" dirty="0">
-                <a:solidFill>
-                  <a:srgbClr val="000000"/>
-                </a:solidFill>
-                <a:latin typeface="Arial" pitchFamily="34" charset="0"/>
-                <a:ea typeface="Arial" pitchFamily="34" charset="-122"/>
-                <a:cs typeface="Arial" pitchFamily="34" charset="-120"/>
-              </a:rPr>
-              <a:t>“Repent, and each one of you be baptized in the name of Jesus Christ” </a:t>
-            </a:r>
-            <a:pPr algn="l" indent="0" marL="0">
-              <a:buNone/>
-            </a:pPr>
-            <a:r>
-              <a:rPr lang="en-US" sz="1200" b="1" dirty="0">
-                <a:solidFill>
-                  <a:srgbClr val="000000"/>
-                </a:solidFill>
-                <a:latin typeface="Arial" pitchFamily="34" charset="0"/>
-                <a:ea typeface="Arial" pitchFamily="34" charset="-122"/>
-                <a:cs typeface="Arial" pitchFamily="34" charset="-120"/>
-              </a:rPr>
               <a:t>(Acts 2:38)</a:t>
             </a:r>
-            <a:endParaRPr lang="en-US" sz="1600" dirty="0"/>
+            <a:endParaRPr lang="en-US" sz="2000" dirty="0"/>
           </a:p>
         </p:txBody>
       </p:sp>
@@ -2685,8 +2782,8 @@
         </p:nvSpPr>
         <p:spPr>
           <a:xfrm>
-            <a:off x="365760" y="2377440"/>
-            <a:ext cx="8412480" cy="1417320"/>
+            <a:off x="365760" y="2650504"/>
+            <a:ext cx="8412480" cy="1556991"/>
           </a:xfrm>
           <a:prstGeom prst="rect">
             <a:avLst/>
@@ -2698,11 +2795,11 @@
           <a:bodyPr wrap="square" lIns="0" tIns="0" rIns="0" bIns="0" rtlCol="0" anchor="t"/>
           <a:lstStyle/>
           <a:p>
-            <a:pPr algn="l" indent="0" marL="0">
+            <a:pPr marL="0" indent="0" algn="l">
               <a:buNone/>
             </a:pPr>
             <a:r>
-              <a:rPr lang="en-US" sz="1350" b="1" dirty="0">
+              <a:rPr lang="en-US" sz="1600" b="1" dirty="0">
                 <a:solidFill>
                   <a:srgbClr val="1F497D"/>
                 </a:solidFill>
@@ -2710,14 +2807,39 @@
                 <a:ea typeface="Arial" pitchFamily="34" charset="-122"/>
                 <a:cs typeface="Arial" pitchFamily="34" charset="-120"/>
               </a:rPr>
-              <a:t>And here is the revealing text — response to a commanded washing disclosed the whole heart:
+              <a:t>And here is the revealing text → response to a commanded washing disclosed the whole heart:
 </a:t>
             </a:r>
-            <a:pPr algn="l" indent="0" marL="0">
+            <a:r>
+              <a:rPr lang="en-US" b="1" i="1" dirty="0">
+                <a:solidFill>
+                  <a:srgbClr val="000000"/>
+                </a:solidFill>
+                <a:latin typeface="Arial" pitchFamily="34" charset="0"/>
+                <a:ea typeface="Arial" pitchFamily="34" charset="-122"/>
+                <a:cs typeface="Arial" pitchFamily="34" charset="-120"/>
+              </a:rPr>
+              <a:t>“The Pharisees and the experts in religious law rejected God’s purpose for themselves, because they had not been baptized by John.” </a:t>
+            </a:r>
+            <a:r>
+              <a:rPr lang="en-US" sz="1600" b="1" dirty="0">
+                <a:solidFill>
+                  <a:srgbClr val="000000"/>
+                </a:solidFill>
+                <a:latin typeface="Arial" pitchFamily="34" charset="0"/>
+                <a:ea typeface="Arial" pitchFamily="34" charset="-122"/>
+                <a:cs typeface="Arial" pitchFamily="34" charset="-120"/>
+              </a:rPr>
+              <a:t>(Luke 7:29–30)</a:t>
+            </a:r>
+            <a:endParaRPr lang="en-US" sz="2000" dirty="0"/>
+          </a:p>
+          <a:p>
+            <a:pPr marL="0" indent="0" algn="l">
               <a:buNone/>
             </a:pPr>
             <a:r>
-              <a:rPr lang="en-US" sz="1450" b="1" i="1" dirty="0">
+              <a:rPr lang="en-US" sz="1600" dirty="0">
                 <a:solidFill>
                   <a:srgbClr val="000000"/>
                 </a:solidFill>
@@ -2725,43 +2847,9 @@
                 <a:ea typeface="Arial" pitchFamily="34" charset="-122"/>
                 <a:cs typeface="Arial" pitchFamily="34" charset="-120"/>
               </a:rPr>
-              <a:t>“The Pharisees and the experts in religious law rejected God’s purpose for themselves, because they had not been baptized by John.” </a:t>
-            </a:r>
-            <a:pPr algn="l" indent="0" marL="0">
-              <a:buNone/>
-            </a:pPr>
-            <a:r>
-              <a:rPr lang="en-US" sz="1350" b="1" dirty="0">
-                <a:solidFill>
-                  <a:srgbClr val="000000"/>
-                </a:solidFill>
-                <a:latin typeface="Arial" pitchFamily="34" charset="0"/>
-                <a:ea typeface="Arial" pitchFamily="34" charset="-122"/>
-                <a:cs typeface="Arial" pitchFamily="34" charset="-120"/>
-              </a:rPr>
-              <a:t>(Luke 7:29–30)</a:t>
-            </a:r>
-            <a:pPr algn="l" indent="0" marL="0">
-              <a:buNone/>
-            </a:pPr>
-            <a:endParaRPr lang="en-US" sz="1600" dirty="0"/>
-          </a:p>
-          <a:p>
-            <a:pPr algn="l" indent="0" marL="0">
-              <a:buNone/>
-            </a:pPr>
-            <a:r>
-              <a:rPr lang="en-US" sz="1300" dirty="0">
-                <a:solidFill>
-                  <a:srgbClr val="000000"/>
-                </a:solidFill>
-                <a:latin typeface="Arial" pitchFamily="34" charset="0"/>
-                <a:ea typeface="Arial" pitchFamily="34" charset="-122"/>
-                <a:cs typeface="Arial" pitchFamily="34" charset="-120"/>
-              </a:rPr>
-              <a:t>The common people “acknowledged God’s justice” by being baptized; the experts refused — and the refusal WAS the verdict on their posture toward God.</a:t>
-            </a:r>
-            <a:endParaRPr lang="en-US" sz="1600" dirty="0"/>
+              <a:t>The common people “acknowledged God’s justice” by being baptized; the experts refused → and the refusal WAS the verdict on their posture toward God.</a:t>
+            </a:r>
+            <a:endParaRPr lang="en-US" sz="2000" dirty="0"/>
           </a:p>
         </p:txBody>
       </p:sp>
@@ -2773,8 +2861,8 @@
         </p:nvSpPr>
         <p:spPr>
           <a:xfrm>
-            <a:off x="365760" y="3931920"/>
-            <a:ext cx="8412480" cy="1188720"/>
+            <a:off x="365760" y="4272726"/>
+            <a:ext cx="8412480" cy="1417319"/>
           </a:xfrm>
           <a:prstGeom prst="rect">
             <a:avLst/>
@@ -2786,11 +2874,11 @@
           <a:bodyPr wrap="square" lIns="0" tIns="0" rIns="0" bIns="0" rtlCol="0" anchor="t"/>
           <a:lstStyle/>
           <a:p>
-            <a:pPr algn="l" indent="0" marL="0">
+            <a:pPr marL="0" indent="0" algn="l">
               <a:buNone/>
             </a:pPr>
             <a:r>
-              <a:rPr lang="en-US" sz="1400" dirty="0">
+              <a:rPr lang="en-US" dirty="0">
                 <a:solidFill>
                   <a:srgbClr val="000000"/>
                 </a:solidFill>
@@ -2798,13 +2886,11 @@
                 <a:ea typeface="Arial" pitchFamily="34" charset="-122"/>
                 <a:cs typeface="Arial" pitchFamily="34" charset="-120"/>
               </a:rPr>
-              <a:t>Same shape as Eden, Moriah, the manna: </a:t>
-            </a:r>
-            <a:pPr algn="l" indent="0" marL="0">
-              <a:buNone/>
-            </a:pPr>
-            <a:r>
-              <a:rPr lang="en-US" sz="1400" dirty="0">
+              <a:t>Same shape as Eden, Moriah, the manna: a concrete, seemingly modest act whose acceptance or refusal reveals everything. Paul then plants baptism where the old covenant marker stood:
+</a:t>
+            </a:r>
+            <a:r>
+              <a:rPr lang="en-US" sz="1600" b="1" i="1" dirty="0">
                 <a:solidFill>
                   <a:srgbClr val="000000"/>
                 </a:solidFill>
@@ -2812,14 +2898,10 @@
                 <a:ea typeface="Arial" pitchFamily="34" charset="-122"/>
                 <a:cs typeface="Arial" pitchFamily="34" charset="-120"/>
               </a:rPr>
-              <a:t>a concrete, seemingly modest act whose acceptance or refusal reveals everything. Paul then plants baptism where the old covenant marker stood:
-</a:t>
-            </a:r>
-            <a:pPr algn="l" indent="0" marL="0">
-              <a:buNone/>
-            </a:pPr>
-            <a:r>
-              <a:rPr lang="en-US" sz="1350" b="1" i="1" dirty="0">
+              <a:t>“In him you were also circumcised… having been buried with him in baptism, in which also you were raised with him through faith.” </a:t>
+            </a:r>
+            <a:r>
+              <a:rPr lang="en-US" sz="1600" b="1" dirty="0">
                 <a:solidFill>
                   <a:srgbClr val="000000"/>
                 </a:solidFill>
@@ -2827,23 +2909,9 @@
                 <a:ea typeface="Arial" pitchFamily="34" charset="-122"/>
                 <a:cs typeface="Arial" pitchFamily="34" charset="-120"/>
               </a:rPr>
-              <a:t>“In him you were also circumcised… having been buried with him in baptism, in which also you were raised with him through faith.” </a:t>
-            </a:r>
-            <a:pPr algn="l" indent="0" marL="0">
-              <a:buNone/>
-            </a:pPr>
-            <a:r>
-              <a:rPr lang="en-US" sz="1250" b="1" dirty="0">
-                <a:solidFill>
-                  <a:srgbClr val="000000"/>
-                </a:solidFill>
-                <a:latin typeface="Arial" pitchFamily="34" charset="0"/>
-                <a:ea typeface="Arial" pitchFamily="34" charset="-122"/>
-                <a:cs typeface="Arial" pitchFamily="34" charset="-120"/>
-              </a:rPr>
               <a:t>(Colossians 2:11–12)</a:t>
             </a:r>
-            <a:endParaRPr lang="en-US" sz="1600" dirty="0"/>
+            <a:endParaRPr lang="en-US" sz="2000" dirty="0"/>
           </a:p>
         </p:txBody>
       </p:sp>
@@ -2855,7 +2923,7 @@
         </p:nvSpPr>
         <p:spPr>
           <a:xfrm>
-            <a:off x="365760" y="5257800"/>
+            <a:off x="365760" y="5755276"/>
             <a:ext cx="8412480" cy="914400"/>
           </a:xfrm>
           <a:prstGeom prst="rect">
@@ -2868,11 +2936,11 @@
           <a:bodyPr wrap="square" lIns="0" tIns="0" rIns="0" bIns="0" rtlCol="0" anchor="t"/>
           <a:lstStyle/>
           <a:p>
-            <a:pPr algn="l" indent="0" marL="0">
+            <a:pPr marL="0" indent="0" algn="l">
               <a:buNone/>
             </a:pPr>
             <a:r>
-              <a:rPr lang="en-US" sz="1400" b="1" dirty="0">
+              <a:rPr lang="en-US" sz="2000" b="1" dirty="0">
                 <a:solidFill>
                   <a:srgbClr val="1F497D"/>
                 </a:solidFill>
@@ -2882,11 +2950,8 @@
               </a:rPr>
               <a:t>Conversion itself is described as a test passed: </a:t>
             </a:r>
-            <a:pPr algn="l" indent="0" marL="0">
-              <a:buNone/>
-            </a:pPr>
-            <a:r>
-              <a:rPr lang="en-US" sz="1350" b="1" i="1" dirty="0">
+            <a:r>
+              <a:rPr lang="en-US" b="1" i="1" dirty="0">
                 <a:solidFill>
                   <a:srgbClr val="000000"/>
                 </a:solidFill>
@@ -2896,11 +2961,8 @@
               </a:rPr>
               <a:t>“you obeyed from the heart that pattern of teaching” </a:t>
             </a:r>
-            <a:pPr algn="l" indent="0" marL="0">
-              <a:buNone/>
-            </a:pPr>
-            <a:r>
-              <a:rPr lang="en-US" sz="1250" b="1" dirty="0">
+            <a:r>
+              <a:rPr lang="en-US" b="1" dirty="0">
                 <a:solidFill>
                   <a:srgbClr val="000000"/>
                 </a:solidFill>
@@ -2910,11 +2972,8 @@
               </a:rPr>
               <a:t>(Rom 6:17)</a:t>
             </a:r>
-            <a:pPr algn="l" indent="0" marL="0">
-              <a:buNone/>
-            </a:pPr>
-            <a:r>
-              <a:rPr lang="en-US" sz="1350" dirty="0">
+            <a:r>
+              <a:rPr lang="en-US" dirty="0">
                 <a:solidFill>
                   <a:srgbClr val="000000"/>
                 </a:solidFill>
@@ -2922,9 +2981,9 @@
                 <a:ea typeface="Arial" pitchFamily="34" charset="-122"/>
                 <a:cs typeface="Arial" pitchFamily="34" charset="-120"/>
               </a:rPr>
-              <a:t>  — belief that became obedient action.</a:t>
-            </a:r>
-            <a:endParaRPr lang="en-US" sz="1600" dirty="0"/>
+              <a:t>  → belief that became obedient action.</a:t>
+            </a:r>
+            <a:endParaRPr lang="en-US" sz="2400" dirty="0"/>
           </a:p>
         </p:txBody>
       </p:sp>
@@ -2942,26 +3001,26 @@
               <p:cTn id="2" dur="indefinite" nodeType="mainSeq">
                 <p:childTnLst>
                   <p:par>
-                    <p:cTn id="7" fill="hold">
+                    <p:cTn id="3" fill="hold">
                       <p:stCondLst>
                         <p:cond delay="indefinite"/>
                       </p:stCondLst>
                       <p:childTnLst>
                         <p:par>
-                          <p:cTn id="8" fill="hold">
+                          <p:cTn id="4" fill="hold">
                             <p:stCondLst>
                               <p:cond delay="0"/>
                             </p:stCondLst>
                             <p:childTnLst>
                               <p:par>
-                                <p:cTn id="3" presetID="42" presetClass="entr" presetSubtype="0" fill="hold" grpId="0" nodeType="clickEffect">
+                                <p:cTn id="5" presetID="42" presetClass="entr" presetSubtype="0" fill="hold" nodeType="clickEffect">
                                   <p:stCondLst>
                                     <p:cond delay="0"/>
                                   </p:stCondLst>
                                   <p:childTnLst>
                                     <p:set>
                                       <p:cBhvr>
-                                        <p:cTn id="4" dur="1" fill="hold">
+                                        <p:cTn id="6" dur="1" fill="hold">
                                           <p:stCondLst>
                                             <p:cond delay="0"/>
                                           </p:stCondLst>
@@ -2979,7 +3038,7 @@
                                     </p:set>
                                     <p:animEffect transition="in" filter="fade">
                                       <p:cBhvr>
-                                        <p:cTn id="5" dur="1000"/>
+                                        <p:cTn id="7" dur="1000"/>
                                         <p:tgtEl>
                                           <p:spTgt spid="4"/>
                                         </p:tgtEl>
@@ -2987,7 +3046,7 @@
                                     </p:animEffect>
                                     <p:anim calcmode="lin" valueType="num">
                                       <p:cBhvr>
-                                        <p:cTn id="6" dur="1000" fill="hold"/>
+                                        <p:cTn id="8" dur="1000" fill="hold"/>
                                         <p:tgtEl>
                                           <p:spTgt spid="4"/>
                                         </p:tgtEl>
@@ -3018,26 +3077,26 @@
                     </p:cTn>
                   </p:par>
                   <p:par>
-                    <p:cTn id="13" fill="hold">
+                    <p:cTn id="9" fill="hold">
                       <p:stCondLst>
                         <p:cond delay="indefinite"/>
                       </p:stCondLst>
                       <p:childTnLst>
                         <p:par>
-                          <p:cTn id="14" fill="hold">
+                          <p:cTn id="10" fill="hold">
                             <p:stCondLst>
                               <p:cond delay="0"/>
                             </p:stCondLst>
                             <p:childTnLst>
                               <p:par>
-                                <p:cTn id="9" presetID="42" presetClass="entr" presetSubtype="0" fill="hold" grpId="0" nodeType="clickEffect">
+                                <p:cTn id="11" presetID="42" presetClass="entr" presetSubtype="0" fill="hold" nodeType="clickEffect">
                                   <p:stCondLst>
                                     <p:cond delay="0"/>
                                   </p:stCondLst>
                                   <p:childTnLst>
                                     <p:set>
                                       <p:cBhvr>
-                                        <p:cTn id="10" dur="1" fill="hold">
+                                        <p:cTn id="12" dur="1" fill="hold">
                                           <p:stCondLst>
                                             <p:cond delay="0"/>
                                           </p:stCondLst>
@@ -3055,7 +3114,7 @@
                                     </p:set>
                                     <p:animEffect transition="in" filter="fade">
                                       <p:cBhvr>
-                                        <p:cTn id="11" dur="1000"/>
+                                        <p:cTn id="13" dur="1000"/>
                                         <p:tgtEl>
                                           <p:spTgt spid="5"/>
                                         </p:tgtEl>
@@ -3063,7 +3122,7 @@
                                     </p:animEffect>
                                     <p:anim calcmode="lin" valueType="num">
                                       <p:cBhvr>
-                                        <p:cTn id="12" dur="1000" fill="hold"/>
+                                        <p:cTn id="14" dur="1000" fill="hold"/>
                                         <p:tgtEl>
                                           <p:spTgt spid="5"/>
                                         </p:tgtEl>
@@ -3094,26 +3153,26 @@
                     </p:cTn>
                   </p:par>
                   <p:par>
-                    <p:cTn id="19" fill="hold">
+                    <p:cTn id="15" fill="hold">
                       <p:stCondLst>
                         <p:cond delay="indefinite"/>
                       </p:stCondLst>
                       <p:childTnLst>
                         <p:par>
-                          <p:cTn id="20" fill="hold">
+                          <p:cTn id="16" fill="hold">
                             <p:stCondLst>
                               <p:cond delay="0"/>
                             </p:stCondLst>
                             <p:childTnLst>
                               <p:par>
-                                <p:cTn id="15" presetID="42" presetClass="entr" presetSubtype="0" fill="hold" grpId="0" nodeType="clickEffect">
+                                <p:cTn id="17" presetID="42" presetClass="entr" presetSubtype="0" fill="hold" nodeType="clickEffect">
                                   <p:stCondLst>
                                     <p:cond delay="0"/>
                                   </p:stCondLst>
                                   <p:childTnLst>
                                     <p:set>
                                       <p:cBhvr>
-                                        <p:cTn id="16" dur="1" fill="hold">
+                                        <p:cTn id="18" dur="1" fill="hold">
                                           <p:stCondLst>
                                             <p:cond delay="0"/>
                                           </p:stCondLst>
@@ -3131,7 +3190,7 @@
                                     </p:set>
                                     <p:animEffect transition="in" filter="fade">
                                       <p:cBhvr>
-                                        <p:cTn id="17" dur="1000"/>
+                                        <p:cTn id="19" dur="1000"/>
                                         <p:tgtEl>
                                           <p:spTgt spid="6"/>
                                         </p:tgtEl>
@@ -3139,7 +3198,7 @@
                                     </p:animEffect>
                                     <p:anim calcmode="lin" valueType="num">
                                       <p:cBhvr>
-                                        <p:cTn id="18" dur="1000" fill="hold"/>
+                                        <p:cTn id="20" dur="1000" fill="hold"/>
                                         <p:tgtEl>
                                           <p:spTgt spid="6"/>
                                         </p:tgtEl>
@@ -3170,26 +3229,26 @@
                     </p:cTn>
                   </p:par>
                   <p:par>
-                    <p:cTn id="25" fill="hold">
+                    <p:cTn id="21" fill="hold">
                       <p:stCondLst>
                         <p:cond delay="indefinite"/>
                       </p:stCondLst>
                       <p:childTnLst>
                         <p:par>
-                          <p:cTn id="26" fill="hold">
+                          <p:cTn id="22" fill="hold">
                             <p:stCondLst>
                               <p:cond delay="0"/>
                             </p:stCondLst>
                             <p:childTnLst>
                               <p:par>
-                                <p:cTn id="21" presetID="42" presetClass="entr" presetSubtype="0" fill="hold" grpId="0" nodeType="clickEffect">
+                                <p:cTn id="23" presetID="42" presetClass="entr" presetSubtype="0" fill="hold" nodeType="clickEffect">
                                   <p:stCondLst>
                                     <p:cond delay="0"/>
                                   </p:stCondLst>
                                   <p:childTnLst>
                                     <p:set>
                                       <p:cBhvr>
-                                        <p:cTn id="22" dur="1" fill="hold">
+                                        <p:cTn id="24" dur="1" fill="hold">
                                           <p:stCondLst>
                                             <p:cond delay="0"/>
                                           </p:stCondLst>
@@ -3207,7 +3266,7 @@
                                     </p:set>
                                     <p:animEffect transition="in" filter="fade">
                                       <p:cBhvr>
-                                        <p:cTn id="23" dur="1000"/>
+                                        <p:cTn id="25" dur="1000"/>
                                         <p:tgtEl>
                                           <p:spTgt spid="7"/>
                                         </p:tgtEl>
@@ -3215,9 +3274,85 @@
                                     </p:animEffect>
                                     <p:anim calcmode="lin" valueType="num">
                                       <p:cBhvr>
-                                        <p:cTn id="24" dur="1000" fill="hold"/>
+                                        <p:cTn id="26" dur="1000" fill="hold"/>
                                         <p:tgtEl>
                                           <p:spTgt spid="7"/>
+                                        </p:tgtEl>
+                                        <p:attrNameLst>
+                                          <p:attrName>ppt_y</p:attrName>
+                                        </p:attrNameLst>
+                                      </p:cBhvr>
+                                      <p:tavLst>
+                                        <p:tav tm="0">
+                                          <p:val>
+                                            <p:strVal val="#ppt_y+.1"/>
+                                          </p:val>
+                                        </p:tav>
+                                        <p:tav tm="100000">
+                                          <p:val>
+                                            <p:strVal val="#ppt_y"/>
+                                          </p:val>
+                                        </p:tav>
+                                      </p:tavLst>
+                                    </p:anim>
+                                  </p:childTnLst>
+                                </p:cTn>
+                              </p:par>
+                            </p:childTnLst>
+                          </p:cTn>
+                        </p:par>
+                      </p:childTnLst>
+                    </p:cTn>
+                  </p:par>
+                  <p:par>
+                    <p:cTn id="27" fill="hold">
+                      <p:stCondLst>
+                        <p:cond delay="indefinite"/>
+                      </p:stCondLst>
+                      <p:childTnLst>
+                        <p:par>
+                          <p:cTn id="28" fill="hold">
+                            <p:stCondLst>
+                              <p:cond delay="0"/>
+                            </p:stCondLst>
+                            <p:childTnLst>
+                              <p:par>
+                                <p:cTn id="29" presetID="42" presetClass="entr" presetSubtype="0" fill="hold" nodeType="clickEffect">
+                                  <p:stCondLst>
+                                    <p:cond delay="0"/>
+                                  </p:stCondLst>
+                                  <p:childTnLst>
+                                    <p:set>
+                                      <p:cBhvr>
+                                        <p:cTn id="30" dur="1" fill="hold">
+                                          <p:stCondLst>
+                                            <p:cond delay="0"/>
+                                          </p:stCondLst>
+                                        </p:cTn>
+                                        <p:tgtEl>
+                                          <p:spTgt spid="8"/>
+                                        </p:tgtEl>
+                                        <p:attrNameLst>
+                                          <p:attrName>style.visibility</p:attrName>
+                                        </p:attrNameLst>
+                                      </p:cBhvr>
+                                      <p:to>
+                                        <p:strVal val="visible"/>
+                                      </p:to>
+                                    </p:set>
+                                    <p:animEffect transition="in" filter="fade">
+                                      <p:cBhvr>
+                                        <p:cTn id="31" dur="1000"/>
+                                        <p:tgtEl>
+                                          <p:spTgt spid="8"/>
+                                        </p:tgtEl>
+                                      </p:cBhvr>
+                                    </p:animEffect>
+                                    <p:anim calcmode="lin" valueType="num">
+                                      <p:cBhvr>
+                                        <p:cTn id="32" dur="1000" fill="hold"/>
+                                        <p:tgtEl>
+                                          <p:spTgt spid="8"/>
                                         </p:tgtEl>
                                         <p:attrNameLst>
                                           <p:attrName>ppt_y</p:attrName>
@@ -3308,7 +3443,7 @@
           <a:bodyPr wrap="square" lIns="0" tIns="0" rIns="0" bIns="0" rtlCol="0" anchor="t"/>
           <a:lstStyle/>
           <a:p>
-            <a:pPr algn="l" indent="0" marL="0">
+            <a:pPr marL="0" indent="0" algn="l">
               <a:buNone/>
             </a:pPr>
             <a:r>
@@ -3347,11 +3482,11 @@
           <a:bodyPr wrap="square" lIns="0" tIns="0" rIns="0" bIns="0" rtlCol="0" anchor="t"/>
           <a:lstStyle/>
           <a:p>
-            <a:pPr algn="l" indent="0" marL="0">
+            <a:pPr marL="0" indent="0" algn="l">
               <a:buNone/>
             </a:pPr>
             <a:r>
-              <a:rPr lang="en-US" sz="1300" b="1" dirty="0">
+              <a:rPr lang="en-US" sz="2000" b="1" dirty="0">
                 <a:solidFill>
                   <a:srgbClr val="4F81BD"/>
                 </a:solidFill>
@@ -3359,9 +3494,9 @@
                 <a:ea typeface="Arial" pitchFamily="34" charset="-122"/>
                 <a:cs typeface="Arial" pitchFamily="34" charset="-120"/>
               </a:rPr>
-              <a:t>The covenant meal asks the covenant question — weekly</a:t>
-            </a:r>
-            <a:endParaRPr lang="en-US" sz="1600" dirty="0"/>
+              <a:t>The covenant meal asks the covenant question → weekly</a:t>
+            </a:r>
+            <a:endParaRPr lang="en-US" sz="2800" dirty="0"/>
           </a:p>
         </p:txBody>
       </p:sp>
@@ -3386,11 +3521,11 @@
           <a:bodyPr wrap="square" lIns="0" tIns="0" rIns="0" bIns="0" rtlCol="0" anchor="t"/>
           <a:lstStyle/>
           <a:p>
-            <a:pPr algn="l" indent="0" marL="0">
+            <a:pPr marL="0" indent="0" algn="l">
               <a:buNone/>
             </a:pPr>
             <a:r>
-              <a:rPr lang="en-US" sz="1400" dirty="0">
+              <a:rPr lang="en-US" dirty="0">
                 <a:solidFill>
                   <a:srgbClr val="000000"/>
                 </a:solidFill>
@@ -3398,14 +3533,11 @@
                 <a:ea typeface="Arial" pitchFamily="34" charset="-122"/>
                 <a:cs typeface="Arial" pitchFamily="34" charset="-120"/>
               </a:rPr>
-              <a:t>The Mosaic covenant scheduled its tests (Sabbath, feasts, daily manna). The New Covenant schedules one too — with the examination commanded outright:
+              <a:t>The Mosaic covenant scheduled its tests (Sabbath, feasts, daily manna). The New Covenant schedules one too → with the examination commanded outright:
 </a:t>
             </a:r>
-            <a:pPr algn="l" indent="0" marL="0">
-              <a:buNone/>
-            </a:pPr>
-            <a:r>
-              <a:rPr lang="en-US" sz="1600" b="1" i="1" dirty="0">
+            <a:r>
+              <a:rPr lang="en-US" sz="2000" b="1" i="1" dirty="0">
                 <a:solidFill>
                   <a:srgbClr val="000000"/>
                 </a:solidFill>
@@ -3415,11 +3547,8 @@
               </a:rPr>
               <a:t>“A person should examine himself first, and in this way let him eat the bread and drink of the cup.” </a:t>
             </a:r>
-            <a:pPr algn="l" indent="0" marL="0">
-              <a:buNone/>
-            </a:pPr>
-            <a:r>
-              <a:rPr lang="en-US" sz="1500" b="1" dirty="0">
+            <a:r>
+              <a:rPr lang="en-US" b="1" dirty="0">
                 <a:solidFill>
                   <a:srgbClr val="000000"/>
                 </a:solidFill>
@@ -3429,7 +3558,7 @@
               </a:rPr>
               <a:t>(1 Corinthians 11:28)</a:t>
             </a:r>
-            <a:endParaRPr lang="en-US" sz="1600" dirty="0"/>
+            <a:endParaRPr lang="en-US" sz="2000" dirty="0"/>
           </a:p>
         </p:txBody>
       </p:sp>
@@ -3441,7 +3570,7 @@
         </p:nvSpPr>
         <p:spPr>
           <a:xfrm>
-            <a:off x="365760" y="2423160"/>
+            <a:off x="365760" y="2392680"/>
             <a:ext cx="8412480" cy="1005840"/>
           </a:xfrm>
           <a:prstGeom prst="rect">
@@ -3454,11 +3583,11 @@
           <a:bodyPr wrap="square" lIns="0" tIns="0" rIns="0" bIns="0" rtlCol="0" anchor="t"/>
           <a:lstStyle/>
           <a:p>
-            <a:pPr algn="l" indent="0" marL="0">
+            <a:pPr marL="0" indent="0" algn="l">
               <a:buNone/>
             </a:pPr>
             <a:r>
-              <a:rPr lang="en-US" sz="1450" b="1" i="1" dirty="0">
+              <a:rPr lang="en-US" b="1" i="1" dirty="0">
                 <a:solidFill>
                   <a:srgbClr val="1F497D"/>
                 </a:solidFill>
@@ -3468,11 +3597,8 @@
               </a:rPr>
               <a:t>The verb is dokimazeto </a:t>
             </a:r>
-            <a:pPr algn="l" indent="0" marL="0">
-              <a:buNone/>
-            </a:pPr>
-            <a:r>
-              <a:rPr lang="en-US" sz="1400" dirty="0">
+            <a:r>
+              <a:rPr lang="en-US" dirty="0">
                 <a:solidFill>
                   <a:srgbClr val="000000"/>
                 </a:solidFill>
@@ -3480,9 +3606,9 @@
                 <a:ea typeface="Arial" pitchFamily="34" charset="-122"/>
                 <a:cs typeface="Arial" pitchFamily="34" charset="-120"/>
               </a:rPr>
-              <a:t>— the assayer’s word from Week 5’s toolkit. The Lord’s Supper is the only ordinance with a STANDING, repeated, commanded self-test attached — and real consequences for taking it carelessly (11:27–30).</a:t>
-            </a:r>
-            <a:endParaRPr lang="en-US" sz="1600" dirty="0"/>
+              <a:t>→ the assayer’s word from Week 5’s toolkit. The Lord’s Supper is the only ordinance with a STANDING, repeated, commanded self-test attached → and real consequences for taking it carelessly (11:27–30).</a:t>
+            </a:r>
+            <a:endParaRPr lang="en-US" sz="2000" dirty="0"/>
           </a:p>
         </p:txBody>
       </p:sp>
@@ -3494,7 +3620,7 @@
         </p:nvSpPr>
         <p:spPr>
           <a:xfrm>
-            <a:off x="365760" y="3520440"/>
+            <a:off x="365760" y="3505200"/>
             <a:ext cx="8412480" cy="1097280"/>
           </a:xfrm>
           <a:prstGeom prst="rect">
@@ -3507,11 +3633,11 @@
           <a:bodyPr wrap="square" lIns="0" tIns="0" rIns="0" bIns="0" rtlCol="0" anchor="t"/>
           <a:lstStyle/>
           <a:p>
-            <a:pPr algn="l" indent="0" marL="0">
+            <a:pPr marL="0" indent="0" algn="l">
               <a:buNone/>
             </a:pPr>
             <a:r>
-              <a:rPr lang="en-US" sz="1350" b="1" dirty="0">
+              <a:rPr lang="en-US" b="1" dirty="0">
                 <a:solidFill>
                   <a:srgbClr val="1F497D"/>
                 </a:solidFill>
@@ -3522,11 +3648,8 @@
               <a:t>Two more recurring obediences whose neglect Scripture treats as revealing:
 </a:t>
             </a:r>
-            <a:pPr algn="l" indent="0" marL="0">
-              <a:buNone/>
-            </a:pPr>
-            <a:r>
-              <a:rPr lang="en-US" sz="1350" dirty="0">
+            <a:r>
+              <a:rPr lang="en-US" dirty="0">
                 <a:solidFill>
                   <a:srgbClr val="000000"/>
                 </a:solidFill>
@@ -3534,13 +3657,10 @@
                 <a:ea typeface="Arial" pitchFamily="34" charset="-122"/>
                 <a:cs typeface="Arial" pitchFamily="34" charset="-120"/>
               </a:rPr>
-              <a:t>•  The assembly itself — </a:t>
-            </a:r>
-            <a:pPr algn="l" indent="0" marL="0">
-              <a:buNone/>
-            </a:pPr>
-            <a:r>
-              <a:rPr lang="en-US" sz="1300" b="1" i="1" dirty="0">
+              <a:t>•  The assembly itself → </a:t>
+            </a:r>
+            <a:r>
+              <a:rPr lang="en-US" b="1" i="1" dirty="0">
                 <a:solidFill>
                   <a:srgbClr val="000000"/>
                 </a:solidFill>
@@ -3550,11 +3670,8 @@
               </a:rPr>
               <a:t>“not abandoning our own meetings, as some are in the habit of doing” </a:t>
             </a:r>
-            <a:pPr algn="l" indent="0" marL="0">
-              <a:buNone/>
-            </a:pPr>
-            <a:r>
-              <a:rPr lang="en-US" sz="1200" b="1" dirty="0">
+            <a:r>
+              <a:rPr lang="en-US" b="1" dirty="0">
                 <a:solidFill>
                   <a:srgbClr val="000000"/>
                 </a:solidFill>
@@ -3564,11 +3681,8 @@
               </a:rPr>
               <a:t>(Heb 10:25)</a:t>
             </a:r>
-            <a:pPr algn="l" indent="0" marL="0">
-              <a:buNone/>
-            </a:pPr>
-            <a:r>
-              <a:rPr lang="en-US" sz="1250" i="1" dirty="0">
+            <a:r>
+              <a:rPr lang="en-US" i="1" dirty="0">
                 <a:solidFill>
                   <a:srgbClr val="000000"/>
                 </a:solidFill>
@@ -3578,7 +3692,7 @@
               </a:rPr>
               <a:t>  (forsaking it is a symptom, not a scheduling problem)</a:t>
             </a:r>
-            <a:endParaRPr lang="en-US" sz="1600" dirty="0"/>
+            <a:endParaRPr lang="en-US" sz="2400" dirty="0"/>
           </a:p>
         </p:txBody>
       </p:sp>
@@ -3591,7 +3705,7 @@
         <p:spPr>
           <a:xfrm>
             <a:off x="365760" y="4709160"/>
-            <a:ext cx="8412480" cy="1417320"/>
+            <a:ext cx="8412480" cy="1852414"/>
           </a:xfrm>
           <a:prstGeom prst="rect">
             <a:avLst/>
@@ -3603,11 +3717,11 @@
           <a:bodyPr wrap="square" lIns="0" tIns="0" rIns="0" bIns="0" rtlCol="0" anchor="t"/>
           <a:lstStyle/>
           <a:p>
-            <a:pPr algn="l" indent="0" marL="0">
+            <a:pPr marL="0" indent="0" algn="l">
               <a:buNone/>
             </a:pPr>
             <a:r>
-              <a:rPr lang="en-US" sz="1350" dirty="0">
+              <a:rPr lang="en-US" dirty="0">
                 <a:solidFill>
                   <a:srgbClr val="000000"/>
                 </a:solidFill>
@@ -3615,48 +3729,50 @@
                 <a:ea typeface="Arial" pitchFamily="34" charset="-122"/>
                 <a:cs typeface="Arial" pitchFamily="34" charset="-120"/>
               </a:rPr>
-              <a:t>•  Forgiveness in prayer — which Jesus makes explicitly conditional, and therefore diagnostic:
+              <a:t>•  Forgiveness in prayer → which Jesus makes explicitly conditional, and therefore diagnostic:</a:t>
+            </a:r>
+            <a:r>
+              <a:rPr lang="en-US" sz="1600" dirty="0">
+                <a:solidFill>
+                  <a:srgbClr val="000000"/>
+                </a:solidFill>
+                <a:latin typeface="Arial" pitchFamily="34" charset="0"/>
+                <a:ea typeface="Arial" pitchFamily="34" charset="-122"/>
+                <a:cs typeface="Arial" pitchFamily="34" charset="-120"/>
+              </a:rPr>
+              <a:t>
 </a:t>
             </a:r>
-            <a:pPr algn="l" indent="0" marL="0">
+            <a:r>
+              <a:rPr lang="en-US" b="1" i="1" dirty="0">
+                <a:solidFill>
+                  <a:srgbClr val="000000"/>
+                </a:solidFill>
+                <a:latin typeface="Arial" pitchFamily="34" charset="0"/>
+                <a:ea typeface="Arial" pitchFamily="34" charset="-122"/>
+                <a:cs typeface="Arial" pitchFamily="34" charset="-120"/>
+              </a:rPr>
+              <a:t>“For if you forgive others their sins, your heavenly Father will also forgive you. But if you do not forgive others, your Father will not forgive you.” </a:t>
+            </a:r>
+            <a:r>
+              <a:rPr lang="en-US" sz="1600" b="1" dirty="0">
+                <a:solidFill>
+                  <a:srgbClr val="000000"/>
+                </a:solidFill>
+                <a:latin typeface="Arial" pitchFamily="34" charset="0"/>
+                <a:ea typeface="Arial" pitchFamily="34" charset="-122"/>
+                <a:cs typeface="Arial" pitchFamily="34" charset="-120"/>
+              </a:rPr>
+              <a:t>(Matthew 6:14–15)</a:t>
+            </a:r>
+            <a:endParaRPr lang="en-US" sz="2000" dirty="0"/>
+          </a:p>
+          <a:p>
+            <a:pPr marL="0" indent="0" algn="l">
               <a:buNone/>
             </a:pPr>
             <a:r>
-              <a:rPr lang="en-US" sz="1400" b="1" i="1" dirty="0">
-                <a:solidFill>
-                  <a:srgbClr val="000000"/>
-                </a:solidFill>
-                <a:latin typeface="Arial" pitchFamily="34" charset="0"/>
-                <a:ea typeface="Arial" pitchFamily="34" charset="-122"/>
-                <a:cs typeface="Arial" pitchFamily="34" charset="-120"/>
-              </a:rPr>
-              <a:t>“For if you forgive others their sins, your heavenly Father will also forgive you. But if you do not forgive others, your Father will not forgive you.” </a:t>
-            </a:r>
-            <a:pPr algn="l" indent="0" marL="0">
-              <a:buNone/>
-            </a:pPr>
-            <a:r>
-              <a:rPr lang="en-US" sz="1300" b="1" dirty="0">
-                <a:solidFill>
-                  <a:srgbClr val="000000"/>
-                </a:solidFill>
-                <a:latin typeface="Arial" pitchFamily="34" charset="0"/>
-                <a:ea typeface="Arial" pitchFamily="34" charset="-122"/>
-                <a:cs typeface="Arial" pitchFamily="34" charset="-120"/>
-              </a:rPr>
-              <a:t>(Matthew 6:14–15)</a:t>
-            </a:r>
-            <a:pPr algn="l" indent="0" marL="0">
-              <a:buNone/>
-            </a:pPr>
-            <a:endParaRPr lang="en-US" sz="1600" dirty="0"/>
-          </a:p>
-          <a:p>
-            <a:pPr algn="l" indent="0" marL="0">
-              <a:buNone/>
-            </a:pPr>
-            <a:r>
-              <a:rPr lang="en-US" sz="1400" b="1" dirty="0">
+              <a:rPr lang="en-US" b="1" dirty="0">
                 <a:solidFill>
                   <a:srgbClr val="1F497D"/>
                 </a:solidFill>
@@ -3666,7 +3782,7 @@
               </a:rPr>
               <a:t>Every week the covenant meal asks: is the faith you professed at the door still real at the table?</a:t>
             </a:r>
-            <a:endParaRPr lang="en-US" sz="1600" dirty="0"/>
+            <a:endParaRPr lang="en-US" sz="2000" dirty="0"/>
           </a:p>
         </p:txBody>
       </p:sp>
@@ -3684,26 +3800,26 @@
               <p:cTn id="2" dur="indefinite" nodeType="mainSeq">
                 <p:childTnLst>
                   <p:par>
-                    <p:cTn id="7" fill="hold">
+                    <p:cTn id="3" fill="hold">
                       <p:stCondLst>
                         <p:cond delay="indefinite"/>
                       </p:stCondLst>
                       <p:childTnLst>
                         <p:par>
-                          <p:cTn id="8" fill="hold">
+                          <p:cTn id="4" fill="hold">
                             <p:stCondLst>
                               <p:cond delay="0"/>
                             </p:stCondLst>
                             <p:childTnLst>
                               <p:par>
-                                <p:cTn id="3" presetID="42" presetClass="entr" presetSubtype="0" fill="hold" grpId="0" nodeType="clickEffect">
+                                <p:cTn id="5" presetID="42" presetClass="entr" presetSubtype="0" fill="hold" nodeType="clickEffect">
                                   <p:stCondLst>
                                     <p:cond delay="0"/>
                                   </p:stCondLst>
                                   <p:childTnLst>
                                     <p:set>
                                       <p:cBhvr>
-                                        <p:cTn id="4" dur="1" fill="hold">
+                                        <p:cTn id="6" dur="1" fill="hold">
                                           <p:stCondLst>
                                             <p:cond delay="0"/>
                                           </p:stCondLst>
@@ -3721,7 +3837,7 @@
                                     </p:set>
                                     <p:animEffect transition="in" filter="fade">
                                       <p:cBhvr>
-                                        <p:cTn id="5" dur="1000"/>
+                                        <p:cTn id="7" dur="1000"/>
                                         <p:tgtEl>
                                           <p:spTgt spid="4"/>
                                         </p:tgtEl>
@@ -3729,7 +3845,7 @@
                                     </p:animEffect>
                                     <p:anim calcmode="lin" valueType="num">
                                       <p:cBhvr>
-                                        <p:cTn id="6" dur="1000" fill="hold"/>
+                                        <p:cTn id="8" dur="1000" fill="hold"/>
                                         <p:tgtEl>
                                           <p:spTgt spid="4"/>
                                         </p:tgtEl>
@@ -3760,26 +3876,26 @@
                     </p:cTn>
                   </p:par>
                   <p:par>
-                    <p:cTn id="13" fill="hold">
+                    <p:cTn id="9" fill="hold">
                       <p:stCondLst>
                         <p:cond delay="indefinite"/>
                       </p:stCondLst>
                       <p:childTnLst>
                         <p:par>
-                          <p:cTn id="14" fill="hold">
+                          <p:cTn id="10" fill="hold">
                             <p:stCondLst>
                               <p:cond delay="0"/>
                             </p:stCondLst>
                             <p:childTnLst>
                               <p:par>
-                                <p:cTn id="9" presetID="42" presetClass="entr" presetSubtype="0" fill="hold" grpId="0" nodeType="clickEffect">
+                                <p:cTn id="11" presetID="42" presetClass="entr" presetSubtype="0" fill="hold" nodeType="clickEffect">
                                   <p:stCondLst>
                                     <p:cond delay="0"/>
                                   </p:stCondLst>
                                   <p:childTnLst>
                                     <p:set>
                                       <p:cBhvr>
-                                        <p:cTn id="10" dur="1" fill="hold">
+                                        <p:cTn id="12" dur="1" fill="hold">
                                           <p:stCondLst>
                                             <p:cond delay="0"/>
                                           </p:stCondLst>
@@ -3797,7 +3913,7 @@
                                     </p:set>
                                     <p:animEffect transition="in" filter="fade">
                                       <p:cBhvr>
-                                        <p:cTn id="11" dur="1000"/>
+                                        <p:cTn id="13" dur="1000"/>
                                         <p:tgtEl>
                                           <p:spTgt spid="5"/>
                                         </p:tgtEl>
@@ -3805,7 +3921,7 @@
                                     </p:animEffect>
                                     <p:anim calcmode="lin" valueType="num">
                                       <p:cBhvr>
-                                        <p:cTn id="12" dur="1000" fill="hold"/>
+                                        <p:cTn id="14" dur="1000" fill="hold"/>
                                         <p:tgtEl>
                                           <p:spTgt spid="5"/>
                                         </p:tgtEl>
@@ -3836,26 +3952,26 @@
                     </p:cTn>
                   </p:par>
                   <p:par>
-                    <p:cTn id="19" fill="hold">
+                    <p:cTn id="15" fill="hold">
                       <p:stCondLst>
                         <p:cond delay="indefinite"/>
                       </p:stCondLst>
                       <p:childTnLst>
                         <p:par>
-                          <p:cTn id="20" fill="hold">
+                          <p:cTn id="16" fill="hold">
                             <p:stCondLst>
                               <p:cond delay="0"/>
                             </p:stCondLst>
                             <p:childTnLst>
                               <p:par>
-                                <p:cTn id="15" presetID="42" presetClass="entr" presetSubtype="0" fill="hold" grpId="0" nodeType="clickEffect">
+                                <p:cTn id="17" presetID="42" presetClass="entr" presetSubtype="0" fill="hold" nodeType="clickEffect">
                                   <p:stCondLst>
                                     <p:cond delay="0"/>
                                   </p:stCondLst>
                                   <p:childTnLst>
                                     <p:set>
                                       <p:cBhvr>
-                                        <p:cTn id="16" dur="1" fill="hold">
+                                        <p:cTn id="18" dur="1" fill="hold">
                                           <p:stCondLst>
                                             <p:cond delay="0"/>
                                           </p:stCondLst>
@@ -3873,7 +3989,7 @@
                                     </p:set>
                                     <p:animEffect transition="in" filter="fade">
                                       <p:cBhvr>
-                                        <p:cTn id="17" dur="1000"/>
+                                        <p:cTn id="19" dur="1000"/>
                                         <p:tgtEl>
                                           <p:spTgt spid="6"/>
                                         </p:tgtEl>
@@ -3881,7 +3997,7 @@
                                     </p:animEffect>
                                     <p:anim calcmode="lin" valueType="num">
                                       <p:cBhvr>
-                                        <p:cTn id="18" dur="1000" fill="hold"/>
+                                        <p:cTn id="20" dur="1000" fill="hold"/>
                                         <p:tgtEl>
                                           <p:spTgt spid="6"/>
                                         </p:tgtEl>
@@ -3912,26 +4028,26 @@
                     </p:cTn>
                   </p:par>
                   <p:par>
-                    <p:cTn id="25" fill="hold">
+                    <p:cTn id="21" fill="hold">
                       <p:stCondLst>
                         <p:cond delay="indefinite"/>
                       </p:stCondLst>
                       <p:childTnLst>
                         <p:par>
-                          <p:cTn id="26" fill="hold">
+                          <p:cTn id="22" fill="hold">
                             <p:stCondLst>
                               <p:cond delay="0"/>
                             </p:stCondLst>
                             <p:childTnLst>
                               <p:par>
-                                <p:cTn id="21" presetID="42" presetClass="entr" presetSubtype="0" fill="hold" grpId="0" nodeType="clickEffect">
+                                <p:cTn id="23" presetID="42" presetClass="entr" presetSubtype="0" fill="hold" nodeType="clickEffect">
                                   <p:stCondLst>
                                     <p:cond delay="0"/>
                                   </p:stCondLst>
                                   <p:childTnLst>
                                     <p:set>
                                       <p:cBhvr>
-                                        <p:cTn id="22" dur="1" fill="hold">
+                                        <p:cTn id="24" dur="1" fill="hold">
                                           <p:stCondLst>
                                             <p:cond delay="0"/>
                                           </p:stCondLst>
@@ -3949,7 +4065,7 @@
                                     </p:set>
                                     <p:animEffect transition="in" filter="fade">
                                       <p:cBhvr>
-                                        <p:cTn id="23" dur="1000"/>
+                                        <p:cTn id="25" dur="1000"/>
                                         <p:tgtEl>
                                           <p:spTgt spid="7"/>
                                         </p:tgtEl>
@@ -3957,7 +4073,7 @@
                                     </p:animEffect>
                                     <p:anim calcmode="lin" valueType="num">
                                       <p:cBhvr>
-                                        <p:cTn id="24" dur="1000" fill="hold"/>
+                                        <p:cTn id="26" dur="1000" fill="hold"/>
                                         <p:tgtEl>
                                           <p:spTgt spid="7"/>
                                         </p:tgtEl>
@@ -4050,7 +4166,7 @@
           <a:bodyPr wrap="square" lIns="0" tIns="0" rIns="0" bIns="0" rtlCol="0" anchor="t"/>
           <a:lstStyle/>
           <a:p>
-            <a:pPr algn="l" indent="0" marL="0">
+            <a:pPr marL="0" indent="0" algn="l">
               <a:buNone/>
             </a:pPr>
             <a:r>
@@ -4089,11 +4205,11 @@
           <a:bodyPr wrap="square" lIns="0" tIns="0" rIns="0" bIns="0" rtlCol="0" anchor="t"/>
           <a:lstStyle/>
           <a:p>
-            <a:pPr algn="l" indent="0" marL="0">
+            <a:pPr marL="0" indent="0" algn="l">
               <a:buNone/>
             </a:pPr>
             <a:r>
-              <a:rPr lang="en-US" sz="1300" b="1" dirty="0">
+              <a:rPr lang="en-US" sz="2000" b="1" dirty="0">
                 <a:solidFill>
                   <a:srgbClr val="4F81BD"/>
                 </a:solidFill>
@@ -4101,9 +4217,9 @@
                 <a:ea typeface="Arial" pitchFamily="34" charset="-122"/>
                 <a:cs typeface="Arial" pitchFamily="34" charset="-120"/>
               </a:rPr>
-              <a:t>Three more ways faith is proven — and the last exam of all</a:t>
-            </a:r>
-            <a:endParaRPr lang="en-US" sz="1600" dirty="0"/>
+              <a:t>Three more ways faith is proven → and the last exam of all</a:t>
+            </a:r>
+            <a:endParaRPr lang="en-US" sz="2800" dirty="0"/>
           </a:p>
         </p:txBody>
       </p:sp>
@@ -4133,6 +4249,13 @@
             <a:prstDash val="solid"/>
           </a:ln>
         </p:spPr>
+        <p:txBody>
+          <a:bodyPr/>
+          <a:lstStyle/>
+          <a:p>
+            <a:endParaRPr lang="en-US"/>
+          </a:p>
+        </p:txBody>
       </p:sp>
       <p:sp>
         <p:nvSpPr>
@@ -4155,11 +4278,11 @@
           <a:bodyPr wrap="square" lIns="0" tIns="0" rIns="0" bIns="0" rtlCol="0" anchor="t"/>
           <a:lstStyle/>
           <a:p>
-            <a:pPr algn="l" indent="0" marL="0">
+            <a:pPr marL="0" indent="0" algn="l">
               <a:buNone/>
             </a:pPr>
             <a:r>
-              <a:rPr lang="en-US" sz="1500" b="1" dirty="0">
+              <a:rPr lang="en-US" sz="2000" b="1" dirty="0">
                 <a:solidFill>
                   <a:srgbClr val="FFFFFF"/>
                 </a:solidFill>
@@ -4170,11 +4293,8 @@
               <a:t>CONTINUOUS
 </a:t>
             </a:r>
-            <a:pPr algn="l" indent="0" marL="0">
-              <a:buNone/>
-            </a:pPr>
-            <a:r>
-              <a:rPr lang="en-US" sz="1100" i="1" dirty="0">
+            <a:r>
+              <a:rPr lang="en-US" sz="1600" i="1" dirty="0">
                 <a:solidFill>
                   <a:srgbClr val="C9A227"/>
                 </a:solidFill>
@@ -4182,9 +4302,9 @@
                 <a:ea typeface="Arial" pitchFamily="34" charset="-122"/>
                 <a:cs typeface="Arial" pitchFamily="34" charset="-120"/>
               </a:rPr>
-              <a:t>1 John — “by this we know”</a:t>
-            </a:r>
-            <a:endParaRPr lang="en-US" sz="1600" dirty="0"/>
+              <a:t>1 John → “by this we know”</a:t>
+            </a:r>
+            <a:endParaRPr lang="en-US" sz="2400" dirty="0"/>
           </a:p>
         </p:txBody>
       </p:sp>
@@ -4209,11 +4329,11 @@
           <a:bodyPr wrap="square" lIns="0" tIns="0" rIns="0" bIns="0" rtlCol="0" anchor="t"/>
           <a:lstStyle/>
           <a:p>
-            <a:pPr algn="l" indent="0" marL="0">
+            <a:pPr marL="0" indent="0" algn="l">
               <a:buNone/>
             </a:pPr>
             <a:r>
-              <a:rPr lang="en-US" sz="1150" dirty="0">
+              <a:rPr lang="en-US" sz="1600" dirty="0">
                 <a:solidFill>
                   <a:srgbClr val="FFFFFF"/>
                 </a:solidFill>
@@ -4223,14 +4343,14 @@
               </a:rPr>
               <a:t>• Moral: keep his commands (2:3)</a:t>
             </a:r>
-            <a:endParaRPr lang="en-US" sz="1600" dirty="0"/>
-          </a:p>
-          <a:p>
-            <a:pPr algn="l" indent="0" marL="0">
+            <a:endParaRPr lang="en-US" sz="2400" dirty="0"/>
+          </a:p>
+          <a:p>
+            <a:pPr marL="0" indent="0" algn="l">
               <a:buNone/>
             </a:pPr>
             <a:r>
-              <a:rPr lang="en-US" sz="1150" dirty="0">
+              <a:rPr lang="en-US" sz="1600" dirty="0">
                 <a:solidFill>
                   <a:srgbClr val="FFFFFF"/>
                 </a:solidFill>
@@ -4240,14 +4360,14 @@
               </a:rPr>
               <a:t>• Relational: love the brothers (3:14)</a:t>
             </a:r>
-            <a:endParaRPr lang="en-US" sz="1600" dirty="0"/>
-          </a:p>
-          <a:p>
-            <a:pPr algn="l" indent="0" marL="0">
+            <a:endParaRPr lang="en-US" sz="2400" dirty="0"/>
+          </a:p>
+          <a:p>
+            <a:pPr marL="0" indent="0" algn="l">
               <a:buNone/>
             </a:pPr>
             <a:r>
-              <a:rPr lang="en-US" sz="1150" dirty="0">
+              <a:rPr lang="en-US" sz="1600" dirty="0">
                 <a:solidFill>
                   <a:srgbClr val="FFFFFF"/>
                 </a:solidFill>
@@ -4257,7 +4377,7 @@
               </a:rPr>
               <a:t>• Doctrinal: test the spirits (4:1–3)</a:t>
             </a:r>
-            <a:endParaRPr lang="en-US" sz="1600" dirty="0"/>
+            <a:endParaRPr lang="en-US" sz="2400" dirty="0"/>
           </a:p>
         </p:txBody>
       </p:sp>
@@ -4289,6 +4409,13 @@
             <a:prstDash val="solid"/>
           </a:ln>
         </p:spPr>
+        <p:txBody>
+          <a:bodyPr/>
+          <a:lstStyle/>
+          <a:p>
+            <a:endParaRPr lang="en-US"/>
+          </a:p>
+        </p:txBody>
       </p:sp>
       <p:sp>
         <p:nvSpPr>
@@ -4311,11 +4438,11 @@
           <a:bodyPr wrap="square" lIns="0" tIns="0" rIns="0" bIns="0" rtlCol="0" anchor="t"/>
           <a:lstStyle/>
           <a:p>
-            <a:pPr algn="l" indent="0" marL="0">
+            <a:pPr marL="0" indent="0" algn="l">
               <a:buNone/>
             </a:pPr>
             <a:r>
-              <a:rPr lang="en-US" sz="1500" b="1" dirty="0">
+              <a:rPr lang="en-US" sz="2400" b="1" dirty="0">
                 <a:solidFill>
                   <a:srgbClr val="FFFFFF"/>
                 </a:solidFill>
@@ -4326,11 +4453,8 @@
               <a:t>PROVIDENTIAL
 </a:t>
             </a:r>
-            <a:pPr algn="l" indent="0" marL="0">
-              <a:buNone/>
-            </a:pPr>
-            <a:r>
-              <a:rPr lang="en-US" sz="1100" i="1" dirty="0">
+            <a:r>
+              <a:rPr lang="en-US" i="1" dirty="0">
                 <a:solidFill>
                   <a:srgbClr val="C9A227"/>
                 </a:solidFill>
@@ -4340,7 +4464,7 @@
               </a:rPr>
               <a:t>Trials &amp; wealth</a:t>
             </a:r>
-            <a:endParaRPr lang="en-US" sz="1600" dirty="0"/>
+            <a:endParaRPr lang="en-US" sz="2800" dirty="0"/>
           </a:p>
         </p:txBody>
       </p:sp>
@@ -4365,11 +4489,11 @@
           <a:bodyPr wrap="square" lIns="0" tIns="0" rIns="0" bIns="0" rtlCol="0" anchor="t"/>
           <a:lstStyle/>
           <a:p>
-            <a:pPr algn="l" indent="0" marL="0">
+            <a:pPr marL="0" indent="0" algn="l">
               <a:buNone/>
             </a:pPr>
             <a:r>
-              <a:rPr lang="en-US" sz="1150" dirty="0">
+              <a:rPr lang="en-US" sz="1600" dirty="0">
                 <a:solidFill>
                   <a:srgbClr val="FFFFFF"/>
                 </a:solidFill>
@@ -4379,14 +4503,14 @@
               </a:rPr>
               <a:t>• Suffering proves genuineness (Jas 1:2–3,12; 1 Pet 1:6–7)</a:t>
             </a:r>
-            <a:endParaRPr lang="en-US" sz="1600" dirty="0"/>
-          </a:p>
-          <a:p>
-            <a:pPr algn="l" indent="0" marL="0">
+            <a:endParaRPr lang="en-US" sz="2400" dirty="0"/>
+          </a:p>
+          <a:p>
+            <a:pPr marL="0" indent="0" algn="l">
               <a:buNone/>
             </a:pPr>
             <a:r>
-              <a:rPr lang="en-US" sz="1150" dirty="0">
+              <a:rPr lang="en-US" sz="1600" dirty="0">
                 <a:solidFill>
                   <a:srgbClr val="FFFFFF"/>
                 </a:solidFill>
@@ -4396,7 +4520,7 @@
               </a:rPr>
               <a:t>• Money is the church’s manna: “I am testing the genuineness of your love” (2 Cor 8:8)</a:t>
             </a:r>
-            <a:endParaRPr lang="en-US" sz="1600" dirty="0"/>
+            <a:endParaRPr lang="en-US" sz="2400" dirty="0"/>
           </a:p>
         </p:txBody>
       </p:sp>
@@ -4428,6 +4552,13 @@
             <a:prstDash val="solid"/>
           </a:ln>
         </p:spPr>
+        <p:txBody>
+          <a:bodyPr/>
+          <a:lstStyle/>
+          <a:p>
+            <a:endParaRPr lang="en-US"/>
+          </a:p>
+        </p:txBody>
       </p:sp>
       <p:sp>
         <p:nvSpPr>
@@ -4450,11 +4581,11 @@
           <a:bodyPr wrap="square" lIns="0" tIns="0" rIns="0" bIns="0" rtlCol="0" anchor="t"/>
           <a:lstStyle/>
           <a:p>
-            <a:pPr algn="l" indent="0" marL="0">
+            <a:pPr marL="0" indent="0" algn="l">
               <a:buNone/>
             </a:pPr>
             <a:r>
-              <a:rPr lang="en-US" sz="1500" b="1" dirty="0">
+              <a:rPr lang="en-US" sz="2400" b="1" dirty="0">
                 <a:solidFill>
                   <a:srgbClr val="FFFFFF"/>
                 </a:solidFill>
@@ -4465,11 +4596,8 @@
               <a:t>FINAL
 </a:t>
             </a:r>
-            <a:pPr algn="l" indent="0" marL="0">
-              <a:buNone/>
-            </a:pPr>
-            <a:r>
-              <a:rPr lang="en-US" sz="1100" i="1" dirty="0">
+            <a:r>
+              <a:rPr lang="en-US" i="1" dirty="0">
                 <a:solidFill>
                   <a:srgbClr val="C9A227"/>
                 </a:solidFill>
@@ -4479,7 +4607,7 @@
               </a:rPr>
               <a:t>The last exam</a:t>
             </a:r>
-            <a:endParaRPr lang="en-US" sz="1600" dirty="0"/>
+            <a:endParaRPr lang="en-US" sz="2800" dirty="0"/>
           </a:p>
         </p:txBody>
       </p:sp>
@@ -4504,11 +4632,11 @@
           <a:bodyPr wrap="square" lIns="0" tIns="0" rIns="0" bIns="0" rtlCol="0" anchor="t"/>
           <a:lstStyle/>
           <a:p>
-            <a:pPr algn="l" indent="0" marL="0">
+            <a:pPr marL="0" indent="0" algn="l">
               <a:buNone/>
             </a:pPr>
             <a:r>
-              <a:rPr lang="en-US" sz="1150" dirty="0">
+              <a:rPr lang="en-US" sz="1600" dirty="0">
                 <a:solidFill>
                   <a:srgbClr val="FFFFFF"/>
                 </a:solidFill>
@@ -4518,14 +4646,14 @@
               </a:rPr>
               <a:t>• Examine yourselves now (2 Cor 13:5)</a:t>
             </a:r>
-            <a:endParaRPr lang="en-US" sz="1600" dirty="0"/>
-          </a:p>
-          <a:p>
-            <a:pPr algn="l" indent="0" marL="0">
+            <a:endParaRPr lang="en-US" sz="2400" dirty="0"/>
+          </a:p>
+          <a:p>
+            <a:pPr marL="0" indent="0" algn="l">
               <a:buNone/>
             </a:pPr>
             <a:r>
-              <a:rPr lang="en-US" sz="1150" dirty="0">
+              <a:rPr lang="en-US" sz="1600" dirty="0">
                 <a:solidFill>
                   <a:srgbClr val="FFFFFF"/>
                 </a:solidFill>
@@ -4535,7 +4663,7 @@
               </a:rPr>
               <a:t>• “Not everyone who says ‘Lord, Lord’… but the one who DOES the will” (Matt 7:21–27)</a:t>
             </a:r>
-            <a:endParaRPr lang="en-US" sz="1600" dirty="0"/>
+            <a:endParaRPr lang="en-US" sz="2400" dirty="0"/>
           </a:p>
         </p:txBody>
       </p:sp>
@@ -4560,11 +4688,11 @@
           <a:bodyPr wrap="square" lIns="0" tIns="0" rIns="0" bIns="0" rtlCol="0" anchor="t"/>
           <a:lstStyle/>
           <a:p>
-            <a:pPr algn="l" indent="0" marL="0">
+            <a:pPr marL="0" indent="0" algn="l">
               <a:buNone/>
             </a:pPr>
             <a:r>
-              <a:rPr lang="en-US" sz="1350" b="1" dirty="0">
+              <a:rPr lang="en-US" b="1" dirty="0">
                 <a:solidFill>
                   <a:srgbClr val="1F497D"/>
                 </a:solidFill>
@@ -4572,13 +4700,70 @@
                 <a:ea typeface="Arial" pitchFamily="34" charset="-122"/>
                 <a:cs typeface="Arial" pitchFamily="34" charset="-120"/>
               </a:rPr>
-              <a:t>One book is built entirely as a series of tests — 1 John, the “tests of life”: </a:t>
-            </a:r>
-            <a:pPr algn="l" indent="0" marL="0">
+              <a:t>One book is built entirely as a series of tests → 1 John, the “tests of life”: </a:t>
+            </a:r>
+            <a:r>
+              <a:rPr lang="en-US" dirty="0">
+                <a:solidFill>
+                  <a:srgbClr val="000000"/>
+                </a:solidFill>
+                <a:latin typeface="Arial" pitchFamily="34" charset="0"/>
+                <a:ea typeface="Arial" pitchFamily="34" charset="-122"/>
+                <a:cs typeface="Arial" pitchFamily="34" charset="-120"/>
+              </a:rPr>
+              <a:t>do I obey, do I love, do I hold the truth? And the final court is not what we </a:t>
+            </a:r>
+            <a:r>
+              <a:rPr lang="en-US" i="1" dirty="0">
+                <a:solidFill>
+                  <a:srgbClr val="000000"/>
+                </a:solidFill>
+                <a:latin typeface="Arial" pitchFamily="34" charset="0"/>
+                <a:ea typeface="Arial" pitchFamily="34" charset="-122"/>
+                <a:cs typeface="Arial" pitchFamily="34" charset="-120"/>
+              </a:rPr>
+              <a:t>said</a:t>
+            </a:r>
+            <a:r>
+              <a:rPr lang="en-US" dirty="0">
+                <a:solidFill>
+                  <a:srgbClr val="000000"/>
+                </a:solidFill>
+                <a:latin typeface="Arial" pitchFamily="34" charset="0"/>
+                <a:ea typeface="Arial" pitchFamily="34" charset="-122"/>
+                <a:cs typeface="Arial" pitchFamily="34" charset="-120"/>
+              </a:rPr>
+              <a:t> but what we </a:t>
+            </a:r>
+            <a:r>
+              <a:rPr lang="en-US" b="1" dirty="0">
+                <a:solidFill>
+                  <a:srgbClr val="1F497D"/>
+                </a:solidFill>
+                <a:latin typeface="Arial" pitchFamily="34" charset="0"/>
+                <a:ea typeface="Arial" pitchFamily="34" charset="-122"/>
+                <a:cs typeface="Arial" pitchFamily="34" charset="-120"/>
+              </a:rPr>
+              <a:t>did with what we believed.</a:t>
+            </a:r>
+            <a:r>
+              <a:rPr lang="en-US" dirty="0">
+                <a:solidFill>
+                  <a:srgbClr val="000000"/>
+                </a:solidFill>
+                <a:latin typeface="Arial" pitchFamily="34" charset="0"/>
+                <a:ea typeface="Arial" pitchFamily="34" charset="-122"/>
+                <a:cs typeface="Arial" pitchFamily="34" charset="-120"/>
+              </a:rPr>
+              <a:t> </a:t>
+            </a:r>
+          </a:p>
+          <a:p>
+            <a:pPr marL="0" indent="0" algn="l">
               <a:buNone/>
             </a:pPr>
             <a:r>
-              <a:rPr lang="en-US" sz="1350" dirty="0">
+              <a:rPr lang="en-US" dirty="0">
                 <a:solidFill>
                   <a:srgbClr val="000000"/>
                 </a:solidFill>
@@ -4586,65 +4771,9 @@
                 <a:ea typeface="Arial" pitchFamily="34" charset="-122"/>
                 <a:cs typeface="Arial" pitchFamily="34" charset="-120"/>
               </a:rPr>
-              <a:t>do I obey, do I love, do I hold the truth? And the final court is not what we </a:t>
-            </a:r>
-            <a:pPr algn="l" indent="0" marL="0">
-              <a:buNone/>
-            </a:pPr>
-            <a:r>
-              <a:rPr lang="en-US" sz="1350" i="1" dirty="0">
-                <a:solidFill>
-                  <a:srgbClr val="000000"/>
-                </a:solidFill>
-                <a:latin typeface="Arial" pitchFamily="34" charset="0"/>
-                <a:ea typeface="Arial" pitchFamily="34" charset="-122"/>
-                <a:cs typeface="Arial" pitchFamily="34" charset="-120"/>
-              </a:rPr>
-              <a:t>said</a:t>
-            </a:r>
-            <a:pPr algn="l" indent="0" marL="0">
-              <a:buNone/>
-            </a:pPr>
-            <a:r>
-              <a:rPr lang="en-US" sz="1350" dirty="0">
-                <a:solidFill>
-                  <a:srgbClr val="000000"/>
-                </a:solidFill>
-                <a:latin typeface="Arial" pitchFamily="34" charset="0"/>
-                <a:ea typeface="Arial" pitchFamily="34" charset="-122"/>
-                <a:cs typeface="Arial" pitchFamily="34" charset="-120"/>
-              </a:rPr>
-              <a:t> but what we </a:t>
-            </a:r>
-            <a:pPr algn="l" indent="0" marL="0">
-              <a:buNone/>
-            </a:pPr>
-            <a:r>
-              <a:rPr lang="en-US" sz="1350" b="1" dirty="0">
-                <a:solidFill>
-                  <a:srgbClr val="1F497D"/>
-                </a:solidFill>
-                <a:latin typeface="Arial" pitchFamily="34" charset="0"/>
-                <a:ea typeface="Arial" pitchFamily="34" charset="-122"/>
-                <a:cs typeface="Arial" pitchFamily="34" charset="-120"/>
-              </a:rPr>
-              <a:t>did with what we believed</a:t>
-            </a:r>
-            <a:pPr algn="l" indent="0" marL="0">
-              <a:buNone/>
-            </a:pPr>
-            <a:r>
-              <a:rPr lang="en-US" sz="1350" dirty="0">
-                <a:solidFill>
-                  <a:srgbClr val="000000"/>
-                </a:solidFill>
-                <a:latin typeface="Arial" pitchFamily="34" charset="0"/>
-                <a:ea typeface="Arial" pitchFamily="34" charset="-122"/>
-                <a:cs typeface="Arial" pitchFamily="34" charset="-120"/>
-              </a:rPr>
-              <a:t> (Matt 7:24–27 — the two builders; the storm reveals the foundation).</a:t>
-            </a:r>
-            <a:endParaRPr lang="en-US" sz="1600" dirty="0"/>
+              <a:t>(Matt 7:24–27 → the two builders; the storm reveals the foundation).</a:t>
+            </a:r>
+            <a:endParaRPr lang="en-US" sz="2400" dirty="0"/>
           </a:p>
         </p:txBody>
       </p:sp>
@@ -4662,26 +4791,26 @@
               <p:cTn id="2" dur="indefinite" nodeType="mainSeq">
                 <p:childTnLst>
                   <p:par>
-                    <p:cTn id="15" fill="hold">
+                    <p:cTn id="3" fill="hold">
                       <p:stCondLst>
                         <p:cond delay="indefinite"/>
                       </p:stCondLst>
                       <p:childTnLst>
                         <p:par>
-                          <p:cTn id="16" fill="hold">
+                          <p:cTn id="4" fill="hold">
                             <p:stCondLst>
                               <p:cond delay="0"/>
                             </p:stCondLst>
                             <p:childTnLst>
                               <p:par>
-                                <p:cTn id="3" presetID="42" presetClass="entr" presetSubtype="0" fill="hold" grpId="0" nodeType="clickEffect">
+                                <p:cTn id="5" presetID="42" presetClass="entr" presetSubtype="0" fill="hold" nodeType="clickEffect">
                                   <p:stCondLst>
                                     <p:cond delay="0"/>
                                   </p:stCondLst>
                                   <p:childTnLst>
                                     <p:set>
                                       <p:cBhvr>
-                                        <p:cTn id="4" dur="1" fill="hold">
+                                        <p:cTn id="6" dur="1" fill="hold">
                                           <p:stCondLst>
                                             <p:cond delay="0"/>
                                           </p:stCondLst>
@@ -4699,7 +4828,7 @@
                                     </p:set>
                                     <p:animEffect transition="in" filter="fade">
                                       <p:cBhvr>
-                                        <p:cTn id="5" dur="1000"/>
+                                        <p:cTn id="7" dur="1000"/>
                                         <p:tgtEl>
                                           <p:spTgt spid="4"/>
                                         </p:tgtEl>
@@ -4707,7 +4836,7 @@
                                     </p:animEffect>
                                     <p:anim calcmode="lin" valueType="num">
                                       <p:cBhvr>
-                                        <p:cTn id="6" dur="1000" fill="hold"/>
+                                        <p:cTn id="8" dur="1000" fill="hold"/>
                                         <p:tgtEl>
                                           <p:spTgt spid="4"/>
                                         </p:tgtEl>
@@ -4732,14 +4861,14 @@
                                 </p:cTn>
                               </p:par>
                               <p:par>
-                                <p:cTn id="7" presetID="42" presetClass="entr" presetSubtype="0" fill="hold" grpId="0" nodeType="withEffect">
+                                <p:cTn id="9" presetID="42" presetClass="entr" presetSubtype="0" fill="hold" nodeType="withEffect">
                                   <p:stCondLst>
                                     <p:cond delay="0"/>
                                   </p:stCondLst>
                                   <p:childTnLst>
                                     <p:set>
                                       <p:cBhvr>
-                                        <p:cTn id="8" dur="1" fill="hold">
+                                        <p:cTn id="10" dur="1" fill="hold">
                                           <p:stCondLst>
                                             <p:cond delay="0"/>
                                           </p:stCondLst>
@@ -4757,7 +4886,7 @@
                                     </p:set>
                                     <p:animEffect transition="in" filter="fade">
                                       <p:cBhvr>
-                                        <p:cTn id="9" dur="1000"/>
+                                        <p:cTn id="11" dur="1000"/>
                                         <p:tgtEl>
                                           <p:spTgt spid="5"/>
                                         </p:tgtEl>
@@ -4765,7 +4894,7 @@
                                     </p:animEffect>
                                     <p:anim calcmode="lin" valueType="num">
                                       <p:cBhvr>
-                                        <p:cTn id="10" dur="1000" fill="hold"/>
+                                        <p:cTn id="12" dur="1000" fill="hold"/>
                                         <p:tgtEl>
                                           <p:spTgt spid="5"/>
                                         </p:tgtEl>
@@ -4790,14 +4919,14 @@
                                 </p:cTn>
                               </p:par>
                               <p:par>
-                                <p:cTn id="11" presetID="42" presetClass="entr" presetSubtype="0" fill="hold" grpId="0" nodeType="withEffect">
+                                <p:cTn id="13" presetID="42" presetClass="entr" presetSubtype="0" fill="hold" nodeType="withEffect">
                                   <p:stCondLst>
                                     <p:cond delay="0"/>
                                   </p:stCondLst>
                                   <p:childTnLst>
                                     <p:set>
                                       <p:cBhvr>
-                                        <p:cTn id="12" dur="1" fill="hold">
+                                        <p:cTn id="14" dur="1" fill="hold">
                                           <p:stCondLst>
                                             <p:cond delay="0"/>
                                           </p:stCondLst>
@@ -4815,7 +4944,7 @@
                                     </p:set>
                                     <p:animEffect transition="in" filter="fade">
                                       <p:cBhvr>
-                                        <p:cTn id="13" dur="1000"/>
+                                        <p:cTn id="15" dur="1000"/>
                                         <p:tgtEl>
                                           <p:spTgt spid="6"/>
                                         </p:tgtEl>
@@ -4823,7 +4952,7 @@
                                     </p:animEffect>
                                     <p:anim calcmode="lin" valueType="num">
                                       <p:cBhvr>
-                                        <p:cTn id="14" dur="1000" fill="hold"/>
+                                        <p:cTn id="16" dur="1000" fill="hold"/>
                                         <p:tgtEl>
                                           <p:spTgt spid="6"/>
                                         </p:tgtEl>
@@ -4854,26 +4983,26 @@
                     </p:cTn>
                   </p:par>
                   <p:par>
-                    <p:cTn id="29" fill="hold">
+                    <p:cTn id="17" fill="hold">
                       <p:stCondLst>
                         <p:cond delay="indefinite"/>
                       </p:stCondLst>
                       <p:childTnLst>
                         <p:par>
-                          <p:cTn id="30" fill="hold">
+                          <p:cTn id="18" fill="hold">
                             <p:stCondLst>
                               <p:cond delay="0"/>
                             </p:stCondLst>
                             <p:childTnLst>
                               <p:par>
-                                <p:cTn id="17" presetID="42" presetClass="entr" presetSubtype="0" fill="hold" grpId="0" nodeType="clickEffect">
+                                <p:cTn id="19" presetID="42" presetClass="entr" presetSubtype="0" fill="hold" nodeType="clickEffect">
                                   <p:stCondLst>
                                     <p:cond delay="0"/>
                                   </p:stCondLst>
                                   <p:childTnLst>
                                     <p:set>
                                       <p:cBhvr>
-                                        <p:cTn id="18" dur="1" fill="hold">
+                                        <p:cTn id="20" dur="1" fill="hold">
                                           <p:stCondLst>
                                             <p:cond delay="0"/>
                                           </p:stCondLst>
@@ -4891,7 +5020,7 @@
                                     </p:set>
                                     <p:animEffect transition="in" filter="fade">
                                       <p:cBhvr>
-                                        <p:cTn id="19" dur="1000"/>
+                                        <p:cTn id="21" dur="1000"/>
                                         <p:tgtEl>
                                           <p:spTgt spid="7"/>
                                         </p:tgtEl>
@@ -4899,7 +5028,7 @@
                                     </p:animEffect>
                                     <p:anim calcmode="lin" valueType="num">
                                       <p:cBhvr>
-                                        <p:cTn id="20" dur="1000" fill="hold"/>
+                                        <p:cTn id="22" dur="1000" fill="hold"/>
                                         <p:tgtEl>
                                           <p:spTgt spid="7"/>
                                         </p:tgtEl>
@@ -4924,14 +5053,14 @@
                                 </p:cTn>
                               </p:par>
                               <p:par>
-                                <p:cTn id="21" presetID="42" presetClass="entr" presetSubtype="0" fill="hold" grpId="0" nodeType="withEffect">
+                                <p:cTn id="23" presetID="42" presetClass="entr" presetSubtype="0" fill="hold" nodeType="withEffect">
                                   <p:stCondLst>
                                     <p:cond delay="0"/>
                                   </p:stCondLst>
                                   <p:childTnLst>
                                     <p:set>
                                       <p:cBhvr>
-                                        <p:cTn id="22" dur="1" fill="hold">
+                                        <p:cTn id="24" dur="1" fill="hold">
                                           <p:stCondLst>
                                             <p:cond delay="0"/>
                                           </p:stCondLst>
@@ -4949,7 +5078,7 @@
                                     </p:set>
                                     <p:animEffect transition="in" filter="fade">
                                       <p:cBhvr>
-                                        <p:cTn id="23" dur="1000"/>
+                                        <p:cTn id="25" dur="1000"/>
                                         <p:tgtEl>
                                           <p:spTgt spid="8"/>
                                         </p:tgtEl>
@@ -4957,7 +5086,7 @@
                                     </p:animEffect>
                                     <p:anim calcmode="lin" valueType="num">
                                       <p:cBhvr>
-                                        <p:cTn id="24" dur="1000" fill="hold"/>
+                                        <p:cTn id="26" dur="1000" fill="hold"/>
                                         <p:tgtEl>
                                           <p:spTgt spid="8"/>
                                         </p:tgtEl>
@@ -4982,14 +5111,14 @@
                                 </p:cTn>
                               </p:par>
                               <p:par>
-                                <p:cTn id="25" presetID="42" presetClass="entr" presetSubtype="0" fill="hold" grpId="0" nodeType="withEffect">
+                                <p:cTn id="27" presetID="42" presetClass="entr" presetSubtype="0" fill="hold" nodeType="withEffect">
                                   <p:stCondLst>
                                     <p:cond delay="0"/>
                                   </p:stCondLst>
                                   <p:childTnLst>
                                     <p:set>
                                       <p:cBhvr>
-                                        <p:cTn id="26" dur="1" fill="hold">
+                                        <p:cTn id="28" dur="1" fill="hold">
                                           <p:stCondLst>
                                             <p:cond delay="0"/>
                                           </p:stCondLst>
@@ -5007,7 +5136,7 @@
                                     </p:set>
                                     <p:animEffect transition="in" filter="fade">
                                       <p:cBhvr>
-                                        <p:cTn id="27" dur="1000"/>
+                                        <p:cTn id="29" dur="1000"/>
                                         <p:tgtEl>
                                           <p:spTgt spid="9"/>
                                         </p:tgtEl>
@@ -5015,7 +5144,7 @@
                                     </p:animEffect>
                                     <p:anim calcmode="lin" valueType="num">
                                       <p:cBhvr>
-                                        <p:cTn id="28" dur="1000" fill="hold"/>
+                                        <p:cTn id="30" dur="1000" fill="hold"/>
                                         <p:tgtEl>
                                           <p:spTgt spid="9"/>
                                         </p:tgtEl>
@@ -5046,26 +5175,26 @@
                     </p:cTn>
                   </p:par>
                   <p:par>
-                    <p:cTn id="43" fill="hold">
+                    <p:cTn id="31" fill="hold">
                       <p:stCondLst>
                         <p:cond delay="indefinite"/>
                       </p:stCondLst>
                       <p:childTnLst>
                         <p:par>
-                          <p:cTn id="44" fill="hold">
+                          <p:cTn id="32" fill="hold">
                             <p:stCondLst>
                               <p:cond delay="0"/>
                             </p:stCondLst>
                             <p:childTnLst>
                               <p:par>
-                                <p:cTn id="31" presetID="42" presetClass="entr" presetSubtype="0" fill="hold" grpId="0" nodeType="clickEffect">
+                                <p:cTn id="33" presetID="42" presetClass="entr" presetSubtype="0" fill="hold" nodeType="clickEffect">
                                   <p:stCondLst>
                                     <p:cond delay="0"/>
                                   </p:stCondLst>
                                   <p:childTnLst>
                                     <p:set>
                                       <p:cBhvr>
-                                        <p:cTn id="32" dur="1" fill="hold">
+                                        <p:cTn id="34" dur="1" fill="hold">
                                           <p:stCondLst>
                                             <p:cond delay="0"/>
                                           </p:stCondLst>
@@ -5083,7 +5212,7 @@
                                     </p:set>
                                     <p:animEffect transition="in" filter="fade">
                                       <p:cBhvr>
-                                        <p:cTn id="33" dur="1000"/>
+                                        <p:cTn id="35" dur="1000"/>
                                         <p:tgtEl>
                                           <p:spTgt spid="10"/>
                                         </p:tgtEl>
@@ -5091,7 +5220,7 @@
                                     </p:animEffect>
                                     <p:anim calcmode="lin" valueType="num">
                                       <p:cBhvr>
-                                        <p:cTn id="34" dur="1000" fill="hold"/>
+                                        <p:cTn id="36" dur="1000" fill="hold"/>
                                         <p:tgtEl>
                                           <p:spTgt spid="10"/>
                                         </p:tgtEl>
@@ -5116,14 +5245,14 @@
                                 </p:cTn>
                               </p:par>
                               <p:par>
-                                <p:cTn id="35" presetID="42" presetClass="entr" presetSubtype="0" fill="hold" grpId="0" nodeType="withEffect">
+                                <p:cTn id="37" presetID="42" presetClass="entr" presetSubtype="0" fill="hold" nodeType="withEffect">
                                   <p:stCondLst>
                                     <p:cond delay="0"/>
                                   </p:stCondLst>
                                   <p:childTnLst>
                                     <p:set>
                                       <p:cBhvr>
-                                        <p:cTn id="36" dur="1" fill="hold">
+                                        <p:cTn id="38" dur="1" fill="hold">
                                           <p:stCondLst>
                                             <p:cond delay="0"/>
                                           </p:stCondLst>
@@ -5141,7 +5270,7 @@
                                     </p:set>
                                     <p:animEffect transition="in" filter="fade">
                                       <p:cBhvr>
-                                        <p:cTn id="37" dur="1000"/>
+                                        <p:cTn id="39" dur="1000"/>
                                         <p:tgtEl>
                                           <p:spTgt spid="11"/>
                                         </p:tgtEl>
@@ -5149,7 +5278,7 @@
                                     </p:animEffect>
                                     <p:anim calcmode="lin" valueType="num">
                                       <p:cBhvr>
-                                        <p:cTn id="38" dur="1000" fill="hold"/>
+                                        <p:cTn id="40" dur="1000" fill="hold"/>
                                         <p:tgtEl>
                                           <p:spTgt spid="11"/>
                                         </p:tgtEl>
@@ -5174,14 +5303,14 @@
                                 </p:cTn>
                               </p:par>
                               <p:par>
-                                <p:cTn id="39" presetID="42" presetClass="entr" presetSubtype="0" fill="hold" grpId="0" nodeType="withEffect">
+                                <p:cTn id="41" presetID="42" presetClass="entr" presetSubtype="0" fill="hold" nodeType="withEffect">
                                   <p:stCondLst>
                                     <p:cond delay="0"/>
                                   </p:stCondLst>
                                   <p:childTnLst>
                                     <p:set>
                                       <p:cBhvr>
-                                        <p:cTn id="40" dur="1" fill="hold">
+                                        <p:cTn id="42" dur="1" fill="hold">
                                           <p:stCondLst>
                                             <p:cond delay="0"/>
                                           </p:stCondLst>
@@ -5199,7 +5328,7 @@
                                     </p:set>
                                     <p:animEffect transition="in" filter="fade">
                                       <p:cBhvr>
-                                        <p:cTn id="41" dur="1000"/>
+                                        <p:cTn id="43" dur="1000"/>
                                         <p:tgtEl>
                                           <p:spTgt spid="12"/>
                                         </p:tgtEl>
@@ -5207,7 +5336,7 @@
                                     </p:animEffect>
                                     <p:anim calcmode="lin" valueType="num">
                                       <p:cBhvr>
-                                        <p:cTn id="42" dur="1000" fill="hold"/>
+                                        <p:cTn id="44" dur="1000" fill="hold"/>
                                         <p:tgtEl>
                                           <p:spTgt spid="12"/>
                                         </p:tgtEl>
@@ -5238,26 +5367,26 @@
                     </p:cTn>
                   </p:par>
                   <p:par>
-                    <p:cTn id="49" fill="hold">
+                    <p:cTn id="45" fill="hold">
                       <p:stCondLst>
                         <p:cond delay="indefinite"/>
                       </p:stCondLst>
                       <p:childTnLst>
                         <p:par>
-                          <p:cTn id="50" fill="hold">
+                          <p:cTn id="46" fill="hold">
                             <p:stCondLst>
                               <p:cond delay="0"/>
                             </p:stCondLst>
                             <p:childTnLst>
                               <p:par>
-                                <p:cTn id="45" presetID="42" presetClass="entr" presetSubtype="0" fill="hold" grpId="0" nodeType="clickEffect">
+                                <p:cTn id="47" presetID="42" presetClass="entr" presetSubtype="0" fill="hold" nodeType="clickEffect">
                                   <p:stCondLst>
                                     <p:cond delay="0"/>
                                   </p:stCondLst>
                                   <p:childTnLst>
                                     <p:set>
                                       <p:cBhvr>
-                                        <p:cTn id="46" dur="1" fill="hold">
+                                        <p:cTn id="48" dur="1" fill="hold">
                                           <p:stCondLst>
                                             <p:cond delay="0"/>
                                           </p:stCondLst>
@@ -5275,7 +5404,7 @@
                                     </p:set>
                                     <p:animEffect transition="in" filter="fade">
                                       <p:cBhvr>
-                                        <p:cTn id="47" dur="1000"/>
+                                        <p:cTn id="49" dur="1000"/>
                                         <p:tgtEl>
                                           <p:spTgt spid="13"/>
                                         </p:tgtEl>
@@ -5283,7 +5412,7 @@
                                     </p:animEffect>
                                     <p:anim calcmode="lin" valueType="num">
                                       <p:cBhvr>
-                                        <p:cTn id="48" dur="1000" fill="hold"/>
+                                        <p:cTn id="50" dur="1000" fill="hold"/>
                                         <p:tgtEl>
                                           <p:spTgt spid="13"/>
                                         </p:tgtEl>
@@ -5376,7 +5505,7 @@
           <a:bodyPr wrap="square" lIns="0" tIns="0" rIns="0" bIns="0" rtlCol="0" anchor="t"/>
           <a:lstStyle/>
           <a:p>
-            <a:pPr algn="l" indent="0" marL="0">
+            <a:pPr marL="0" indent="0" algn="l">
               <a:buNone/>
             </a:pPr>
             <a:r>
@@ -5415,11 +5544,11 @@
           <a:bodyPr wrap="square" lIns="0" tIns="0" rIns="0" bIns="0" rtlCol="0" anchor="t"/>
           <a:lstStyle/>
           <a:p>
-            <a:pPr algn="l" indent="0" marL="0">
+            <a:pPr marL="0" indent="0" algn="l">
               <a:buNone/>
             </a:pPr>
             <a:r>
-              <a:rPr lang="en-US" sz="1300" b="1" dirty="0">
+              <a:rPr lang="en-US" sz="2000" b="1" dirty="0">
                 <a:solidFill>
                   <a:srgbClr val="4F81BD"/>
                 </a:solidFill>
@@ -5427,9 +5556,9 @@
                 <a:ea typeface="Arial" pitchFamily="34" charset="-122"/>
                 <a:cs typeface="Arial" pitchFamily="34" charset="-120"/>
               </a:rPr>
-              <a:t>Ten minutes — this is the week’s practice</a:t>
-            </a:r>
-            <a:endParaRPr lang="en-US" sz="1600" dirty="0"/>
+              <a:t>Ten minutes → this is the week’s practice</a:t>
+            </a:r>
+            <a:endParaRPr lang="en-US" sz="2800" dirty="0"/>
           </a:p>
         </p:txBody>
       </p:sp>
@@ -5454,11 +5583,11 @@
           <a:bodyPr wrap="square" lIns="0" tIns="0" rIns="0" bIns="0" rtlCol="0" anchor="t"/>
           <a:lstStyle/>
           <a:p>
-            <a:pPr algn="l" indent="0" marL="0">
+            <a:pPr marL="0" indent="0" algn="l">
               <a:buNone/>
             </a:pPr>
             <a:r>
-              <a:rPr lang="en-US" sz="2000" b="1" dirty="0">
+              <a:rPr lang="en-US" sz="2800" b="1" dirty="0">
                 <a:solidFill>
                   <a:srgbClr val="1F497D"/>
                 </a:solidFill>
@@ -5468,11 +5597,8 @@
               </a:rPr>
               <a:t>1.  </a:t>
             </a:r>
-            <a:pPr algn="l" indent="0" marL="0">
-              <a:buNone/>
-            </a:pPr>
-            <a:r>
-              <a:rPr lang="en-US" sz="1800" dirty="0">
+            <a:r>
+              <a:rPr lang="en-US" sz="2400" dirty="0">
                 <a:solidFill>
                   <a:srgbClr val="000000"/>
                 </a:solidFill>
@@ -5480,9 +5606,9 @@
                 <a:ea typeface="Arial" pitchFamily="34" charset="-122"/>
                 <a:cs typeface="Arial" pitchFamily="34" charset="-120"/>
               </a:rPr>
-              <a:t>Of the four — entry, recurring, continuous, providential — which does our congregation talk about least? Why that one?</a:t>
-            </a:r>
-            <a:endParaRPr lang="en-US" sz="1600" dirty="0"/>
+              <a:t>Of the four → entry, recurring, continuous, providential → which does our congregation talk about least? Why that one?</a:t>
+            </a:r>
+            <a:endParaRPr lang="en-US" sz="2000" dirty="0"/>
           </a:p>
         </p:txBody>
       </p:sp>
@@ -5507,11 +5633,11 @@
           <a:bodyPr wrap="square" lIns="0" tIns="0" rIns="0" bIns="0" rtlCol="0" anchor="t"/>
           <a:lstStyle/>
           <a:p>
-            <a:pPr algn="l" indent="0" marL="0">
+            <a:pPr marL="0" indent="0" algn="l">
               <a:buNone/>
             </a:pPr>
             <a:r>
-              <a:rPr lang="en-US" sz="2000" b="1" dirty="0">
+              <a:rPr lang="en-US" sz="2800" b="1" dirty="0">
                 <a:solidFill>
                   <a:srgbClr val="1F497D"/>
                 </a:solidFill>
@@ -5521,11 +5647,8 @@
               </a:rPr>
               <a:t>2.  </a:t>
             </a:r>
-            <a:pPr algn="l" indent="0" marL="0">
-              <a:buNone/>
-            </a:pPr>
-            <a:r>
-              <a:rPr lang="en-US" sz="1800" dirty="0">
+            <a:r>
+              <a:rPr lang="en-US" sz="2400" dirty="0">
                 <a:solidFill>
                   <a:srgbClr val="000000"/>
                 </a:solidFill>
@@ -5533,9 +5656,9 @@
                 <a:ea typeface="Arial" pitchFamily="34" charset="-122"/>
                 <a:cs typeface="Arial" pitchFamily="34" charset="-120"/>
               </a:rPr>
-              <a:t>What does weekly self-examination at the table actually involve — practically? What are you examining for?</a:t>
-            </a:r>
-            <a:endParaRPr lang="en-US" sz="1600" dirty="0"/>
+              <a:t>What does weekly self-examination at the table actually involve → practically? What are you examining for?</a:t>
+            </a:r>
+            <a:endParaRPr lang="en-US" sz="2000" dirty="0"/>
           </a:p>
         </p:txBody>
       </p:sp>
@@ -5560,11 +5683,11 @@
           <a:bodyPr wrap="square" lIns="0" tIns="0" rIns="0" bIns="0" rtlCol="0" anchor="t"/>
           <a:lstStyle/>
           <a:p>
-            <a:pPr algn="l" indent="0" marL="0">
+            <a:pPr marL="0" indent="0" algn="l">
               <a:buNone/>
             </a:pPr>
             <a:r>
-              <a:rPr lang="en-US" sz="1400" b="1" dirty="0">
+              <a:rPr lang="en-US" sz="2000" b="1" dirty="0">
                 <a:solidFill>
                   <a:srgbClr val="000000"/>
                 </a:solidFill>
@@ -5574,11 +5697,8 @@
               </a:rPr>
               <a:t>Berean rule stands: </a:t>
             </a:r>
-            <a:pPr algn="l" indent="0" marL="0">
-              <a:buNone/>
-            </a:pPr>
-            <a:r>
-              <a:rPr lang="en-US" sz="1400" i="1" dirty="0">
+            <a:r>
+              <a:rPr lang="en-US" sz="2000" i="1" dirty="0">
                 <a:solidFill>
                   <a:srgbClr val="000000"/>
                 </a:solidFill>
@@ -5586,9 +5706,9 @@
                 <a:ea typeface="Arial" pitchFamily="34" charset="-122"/>
                 <a:cs typeface="Arial" pitchFamily="34" charset="-120"/>
               </a:rPr>
-              <a:t>every claim goes back to the text — eager, and examining.</a:t>
-            </a:r>
-            <a:endParaRPr lang="en-US" sz="1600" dirty="0"/>
+              <a:t>every claim goes back to the text → eager, and examining.</a:t>
+            </a:r>
+            <a:endParaRPr lang="en-US" sz="2400" dirty="0"/>
           </a:p>
         </p:txBody>
       </p:sp>
@@ -5606,26 +5726,26 @@
               <p:cTn id="2" dur="indefinite" nodeType="mainSeq">
                 <p:childTnLst>
                   <p:par>
-                    <p:cTn id="7" fill="hold">
+                    <p:cTn id="3" fill="hold">
                       <p:stCondLst>
                         <p:cond delay="indefinite"/>
                       </p:stCondLst>
                       <p:childTnLst>
                         <p:par>
-                          <p:cTn id="8" fill="hold">
+                          <p:cTn id="4" fill="hold">
                             <p:stCondLst>
                               <p:cond delay="0"/>
                             </p:stCondLst>
                             <p:childTnLst>
                               <p:par>
-                                <p:cTn id="3" presetID="42" presetClass="entr" presetSubtype="0" fill="hold" grpId="0" nodeType="clickEffect">
+                                <p:cTn id="5" presetID="42" presetClass="entr" presetSubtype="0" fill="hold" nodeType="clickEffect">
                                   <p:stCondLst>
                                     <p:cond delay="0"/>
                                   </p:stCondLst>
                                   <p:childTnLst>
                                     <p:set>
                                       <p:cBhvr>
-                                        <p:cTn id="4" dur="1" fill="hold">
+                                        <p:cTn id="6" dur="1" fill="hold">
                                           <p:stCondLst>
                                             <p:cond delay="0"/>
                                           </p:stCondLst>
@@ -5643,7 +5763,7 @@
                                     </p:set>
                                     <p:animEffect transition="in" filter="fade">
                                       <p:cBhvr>
-                                        <p:cTn id="5" dur="1000"/>
+                                        <p:cTn id="7" dur="1000"/>
                                         <p:tgtEl>
                                           <p:spTgt spid="4"/>
                                         </p:tgtEl>
@@ -5651,7 +5771,7 @@
                                     </p:animEffect>
                                     <p:anim calcmode="lin" valueType="num">
                                       <p:cBhvr>
-                                        <p:cTn id="6" dur="1000" fill="hold"/>
+                                        <p:cTn id="8" dur="1000" fill="hold"/>
                                         <p:tgtEl>
                                           <p:spTgt spid="4"/>
                                         </p:tgtEl>
@@ -5682,26 +5802,26 @@
                     </p:cTn>
                   </p:par>
                   <p:par>
-                    <p:cTn id="13" fill="hold">
+                    <p:cTn id="9" fill="hold">
                       <p:stCondLst>
                         <p:cond delay="indefinite"/>
                       </p:stCondLst>
                       <p:childTnLst>
                         <p:par>
-                          <p:cTn id="14" fill="hold">
+                          <p:cTn id="10" fill="hold">
                             <p:stCondLst>
                               <p:cond delay="0"/>
                             </p:stCondLst>
                             <p:childTnLst>
                               <p:par>
-                                <p:cTn id="9" presetID="42" presetClass="entr" presetSubtype="0" fill="hold" grpId="0" nodeType="clickEffect">
+                                <p:cTn id="11" presetID="42" presetClass="entr" presetSubtype="0" fill="hold" nodeType="clickEffect">
                                   <p:stCondLst>
                                     <p:cond delay="0"/>
                                   </p:stCondLst>
                                   <p:childTnLst>
                                     <p:set>
                                       <p:cBhvr>
-                                        <p:cTn id="10" dur="1" fill="hold">
+                                        <p:cTn id="12" dur="1" fill="hold">
                                           <p:stCondLst>
                                             <p:cond delay="0"/>
                                           </p:stCondLst>
@@ -5719,7 +5839,7 @@
                                     </p:set>
                                     <p:animEffect transition="in" filter="fade">
                                       <p:cBhvr>
-                                        <p:cTn id="11" dur="1000"/>
+                                        <p:cTn id="13" dur="1000"/>
                                         <p:tgtEl>
                                           <p:spTgt spid="5"/>
                                         </p:tgtEl>
@@ -5727,7 +5847,7 @@
                                     </p:animEffect>
                                     <p:anim calcmode="lin" valueType="num">
                                       <p:cBhvr>
-                                        <p:cTn id="12" dur="1000" fill="hold"/>
+                                        <p:cTn id="14" dur="1000" fill="hold"/>
                                         <p:tgtEl>
                                           <p:spTgt spid="5"/>
                                         </p:tgtEl>
@@ -5758,26 +5878,26 @@
                     </p:cTn>
                   </p:par>
                   <p:par>
-                    <p:cTn id="19" fill="hold">
+                    <p:cTn id="15" fill="hold">
                       <p:stCondLst>
                         <p:cond delay="indefinite"/>
                       </p:stCondLst>
                       <p:childTnLst>
                         <p:par>
-                          <p:cTn id="20" fill="hold">
+                          <p:cTn id="16" fill="hold">
                             <p:stCondLst>
                               <p:cond delay="0"/>
                             </p:stCondLst>
                             <p:childTnLst>
                               <p:par>
-                                <p:cTn id="15" presetID="42" presetClass="entr" presetSubtype="0" fill="hold" grpId="0" nodeType="clickEffect">
+                                <p:cTn id="17" presetID="42" presetClass="entr" presetSubtype="0" fill="hold" nodeType="clickEffect">
                                   <p:stCondLst>
                                     <p:cond delay="0"/>
                                   </p:stCondLst>
                                   <p:childTnLst>
                                     <p:set>
                                       <p:cBhvr>
-                                        <p:cTn id="16" dur="1" fill="hold">
+                                        <p:cTn id="18" dur="1" fill="hold">
                                           <p:stCondLst>
                                             <p:cond delay="0"/>
                                           </p:stCondLst>
@@ -5795,7 +5915,7 @@
                                     </p:set>
                                     <p:animEffect transition="in" filter="fade">
                                       <p:cBhvr>
-                                        <p:cTn id="17" dur="1000"/>
+                                        <p:cTn id="19" dur="1000"/>
                                         <p:tgtEl>
                                           <p:spTgt spid="6"/>
                                         </p:tgtEl>
@@ -5803,7 +5923,7 @@
                                     </p:animEffect>
                                     <p:anim calcmode="lin" valueType="num">
                                       <p:cBhvr>
-                                        <p:cTn id="18" dur="1000" fill="hold"/>
+                                        <p:cTn id="20" dur="1000" fill="hold"/>
                                         <p:tgtEl>
                                           <p:spTgt spid="6"/>
                                         </p:tgtEl>
@@ -5896,7 +6016,7 @@
           <a:bodyPr wrap="square" lIns="0" tIns="0" rIns="0" bIns="0" rtlCol="0" anchor="t"/>
           <a:lstStyle/>
           <a:p>
-            <a:pPr algn="l" indent="0" marL="0">
+            <a:pPr marL="0" indent="0" algn="l">
               <a:buNone/>
             </a:pPr>
             <a:r>
@@ -5935,11 +6055,11 @@
           <a:bodyPr wrap="square" lIns="0" tIns="0" rIns="0" bIns="0" rtlCol="0" anchor="t"/>
           <a:lstStyle/>
           <a:p>
-            <a:pPr algn="l" indent="0" marL="0">
+            <a:pPr marL="0" indent="0" algn="l">
               <a:buNone/>
             </a:pPr>
             <a:r>
-              <a:rPr lang="en-US" sz="1300" b="1" dirty="0">
+              <a:rPr lang="en-US" sz="2000" b="1" dirty="0">
                 <a:solidFill>
                   <a:srgbClr val="4F81BD"/>
                 </a:solidFill>
@@ -5947,9 +6067,9 @@
                 <a:ea typeface="Arial" pitchFamily="34" charset="-122"/>
                 <a:cs typeface="Arial" pitchFamily="34" charset="-120"/>
               </a:rPr>
-              <a:t>For next week — eager, and examining</a:t>
-            </a:r>
-            <a:endParaRPr lang="en-US" sz="1600" dirty="0"/>
+              <a:t>For next week → eager, and examining</a:t>
+            </a:r>
+            <a:endParaRPr lang="en-US" sz="2800" dirty="0"/>
           </a:p>
         </p:txBody>
       </p:sp>
@@ -5974,11 +6094,11 @@
           <a:bodyPr wrap="square" lIns="0" tIns="0" rIns="0" bIns="0" rtlCol="0" anchor="t"/>
           <a:lstStyle/>
           <a:p>
-            <a:pPr algn="l" indent="0" marL="0">
+            <a:pPr marL="0" indent="0" algn="l">
               <a:buNone/>
             </a:pPr>
             <a:r>
-              <a:rPr lang="en-US" sz="1700" b="1" dirty="0">
+              <a:rPr lang="en-US" sz="2000" b="1" dirty="0">
                 <a:solidFill>
                   <a:srgbClr val="1F497D"/>
                 </a:solidFill>
@@ -5989,11 +6109,8 @@
               <a:t>For next week, read:
 </a:t>
             </a:r>
-            <a:pPr algn="l" indent="0" marL="0">
-              <a:buNone/>
-            </a:pPr>
-            <a:r>
-              <a:rPr lang="en-US" sz="1500" dirty="0">
+            <a:r>
+              <a:rPr lang="en-US" dirty="0">
                 <a:solidFill>
                   <a:srgbClr val="000000"/>
                 </a:solidFill>
@@ -6001,14 +6118,10 @@
                 <a:ea typeface="Arial" pitchFamily="34" charset="-122"/>
                 <a:cs typeface="Arial" pitchFamily="34" charset="-120"/>
               </a:rPr>
-              <a:t>•  Romans 12:1–2  — what does Paul ask you to place on the altar? Notice both body AND mind.
-</a:t>
-            </a:r>
-            <a:pPr algn="l" indent="0" marL="0">
-              <a:buNone/>
-            </a:pPr>
-            <a:r>
-              <a:rPr lang="en-US" sz="1500" dirty="0">
+              <a:t>•  </a:t>
+            </a:r>
+            <a:r>
+              <a:rPr lang="en-US" b="1" dirty="0">
                 <a:solidFill>
                   <a:srgbClr val="000000"/>
                 </a:solidFill>
@@ -6016,9 +6129,43 @@
                 <a:ea typeface="Arial" pitchFamily="34" charset="-122"/>
                 <a:cs typeface="Arial" pitchFamily="34" charset="-120"/>
               </a:rPr>
-              <a:t>•  Malachi 1:6–14  — what was wrong with the priests’ offerings? Would you hand it to your governor?</a:t>
-            </a:r>
-            <a:endParaRPr lang="en-US" sz="1600" dirty="0"/>
+              <a:t>Romans 12:1–2  </a:t>
+            </a:r>
+            <a:r>
+              <a:rPr lang="en-US" dirty="0">
+                <a:solidFill>
+                  <a:srgbClr val="000000"/>
+                </a:solidFill>
+                <a:latin typeface="Arial" pitchFamily="34" charset="0"/>
+                <a:ea typeface="Arial" pitchFamily="34" charset="-122"/>
+                <a:cs typeface="Arial" pitchFamily="34" charset="-120"/>
+              </a:rPr>
+              <a:t>→ what does Paul ask you to place on the altar? Notice both body AND mind.
+•  </a:t>
+            </a:r>
+            <a:r>
+              <a:rPr lang="en-US" b="1" dirty="0">
+                <a:solidFill>
+                  <a:srgbClr val="000000"/>
+                </a:solidFill>
+                <a:latin typeface="Arial" pitchFamily="34" charset="0"/>
+                <a:ea typeface="Arial" pitchFamily="34" charset="-122"/>
+                <a:cs typeface="Arial" pitchFamily="34" charset="-120"/>
+              </a:rPr>
+              <a:t>Malachi 1:6–14  </a:t>
+            </a:r>
+            <a:r>
+              <a:rPr lang="en-US" dirty="0">
+                <a:solidFill>
+                  <a:srgbClr val="000000"/>
+                </a:solidFill>
+                <a:latin typeface="Arial" pitchFamily="34" charset="0"/>
+                <a:ea typeface="Arial" pitchFamily="34" charset="-122"/>
+                <a:cs typeface="Arial" pitchFamily="34" charset="-120"/>
+              </a:rPr>
+              <a:t>→ what was wrong with the priests’ offerings? Would you hand it to your governor?</a:t>
+            </a:r>
+            <a:endParaRPr lang="en-US" sz="2000" dirty="0"/>
           </a:p>
         </p:txBody>
       </p:sp>
@@ -6043,11 +6190,11 @@
           <a:bodyPr wrap="square" lIns="0" tIns="0" rIns="0" bIns="0" rtlCol="0" anchor="t"/>
           <a:lstStyle/>
           <a:p>
-            <a:pPr algn="l" indent="0" marL="0">
+            <a:pPr marL="0" indent="0" algn="l">
               <a:buNone/>
             </a:pPr>
             <a:r>
-              <a:rPr lang="en-US" sz="1600" b="1" dirty="0">
+              <a:rPr lang="en-US" sz="2000" b="1" dirty="0">
                 <a:solidFill>
                   <a:srgbClr val="000000"/>
                 </a:solidFill>
@@ -6057,11 +6204,8 @@
               </a:rPr>
               <a:t>Next week: </a:t>
             </a:r>
-            <a:pPr algn="l" indent="0" marL="0">
-              <a:buNone/>
-            </a:pPr>
-            <a:r>
-              <a:rPr lang="en-US" sz="1600" i="1" dirty="0">
+            <a:r>
+              <a:rPr lang="en-US" sz="2000" i="1" dirty="0">
                 <a:solidFill>
                   <a:srgbClr val="000000"/>
                 </a:solidFill>
@@ -6069,9 +6213,9 @@
                 <a:ea typeface="Arial" pitchFamily="34" charset="-122"/>
                 <a:cs typeface="Arial" pitchFamily="34" charset="-120"/>
               </a:rPr>
-              <a:t>The Altar Today — do Christians offer sacrifices? The atonement is finished; so what goes on the altar now?</a:t>
-            </a:r>
-            <a:endParaRPr lang="en-US" sz="1600" dirty="0"/>
+              <a:t>The Altar Today → do Christians offer sacrifices? The atonement is finished; so what goes on the altar now?</a:t>
+            </a:r>
+            <a:endParaRPr lang="en-US" sz="2000" dirty="0"/>
           </a:p>
         </p:txBody>
       </p:sp>
@@ -6096,11 +6240,11 @@
           <a:bodyPr wrap="square" lIns="0" tIns="0" rIns="0" bIns="0" rtlCol="0" anchor="t"/>
           <a:lstStyle/>
           <a:p>
-            <a:pPr algn="l" indent="0" marL="0">
+            <a:pPr marL="0" indent="0" algn="l">
               <a:buNone/>
             </a:pPr>
             <a:r>
-              <a:rPr lang="en-US" sz="1500" b="1" dirty="0">
+              <a:rPr lang="en-US" b="1" dirty="0">
                 <a:solidFill>
                   <a:srgbClr val="000000"/>
                 </a:solidFill>
@@ -6108,12 +6252,20 @@
                 <a:ea typeface="Arial" pitchFamily="34" charset="-122"/>
                 <a:cs typeface="Arial" pitchFamily="34" charset="-120"/>
               </a:rPr>
-              <a:t>Carry this week in one sentence:
+              <a:t>This week in one sentence:
 </a:t>
             </a:r>
-            <a:pPr algn="l" indent="0" marL="0">
-              <a:buNone/>
-            </a:pPr>
+            <a:r>
+              <a:rPr lang="en-US" sz="2000" b="1" i="1" dirty="0">
+                <a:solidFill>
+                  <a:srgbClr val="1F497D"/>
+                </a:solidFill>
+                <a:latin typeface="Arial" pitchFamily="34" charset="0"/>
+                <a:ea typeface="Arial" pitchFamily="34" charset="-122"/>
+                <a:cs typeface="Arial" pitchFamily="34" charset="-120"/>
+              </a:rPr>
+              <a:t>The church’s faith is tested at the door, at the table, in the life, and through the fire</a:t>
+            </a:r>
             <a:r>
               <a:rPr lang="en-US" sz="1650" b="1" i="1" dirty="0">
                 <a:solidFill>
@@ -6123,7 +6275,7 @@
                 <a:ea typeface="Arial" pitchFamily="34" charset="-122"/>
                 <a:cs typeface="Arial" pitchFamily="34" charset="-120"/>
               </a:rPr>
-              <a:t>The church’s faith is tested at the door, at the table, in the life, and through the fire.</a:t>
+              <a:t>.</a:t>
             </a:r>
             <a:endParaRPr lang="en-US" sz="1600" dirty="0"/>
           </a:p>
@@ -6150,11 +6302,11 @@
           <a:bodyPr wrap="square" lIns="0" tIns="0" rIns="0" bIns="0" rtlCol="0" anchor="t"/>
           <a:lstStyle/>
           <a:p>
-            <a:pPr algn="ctr" indent="0" marL="0">
+            <a:pPr marL="0" indent="0" algn="ctr">
               <a:buNone/>
             </a:pPr>
             <a:r>
-              <a:rPr lang="en-US" sz="1700" b="1" i="1" dirty="0">
+              <a:rPr lang="en-US" b="1" i="1" dirty="0">
                 <a:solidFill>
                   <a:srgbClr val="1F497D"/>
                 </a:solidFill>
@@ -6162,9 +6314,25 @@
                 <a:ea typeface="Arial" pitchFamily="34" charset="-122"/>
                 <a:cs typeface="Arial" pitchFamily="34" charset="-120"/>
               </a:rPr>
-              <a:t>“Examine yourselves to see whether you are in the faith.”  (2 Corinthians 13:5)</a:t>
-            </a:r>
-            <a:endParaRPr lang="en-US" sz="1600" dirty="0"/>
+              <a:t>“Examine yourselves to see whether you are in the faith.”  </a:t>
+            </a:r>
+          </a:p>
+          <a:p>
+            <a:pPr marL="0" indent="0" algn="ctr">
+              <a:buNone/>
+            </a:pPr>
+            <a:r>
+              <a:rPr lang="en-US" b="1" i="1" dirty="0">
+                <a:solidFill>
+                  <a:srgbClr val="1F497D"/>
+                </a:solidFill>
+                <a:latin typeface="Arial" pitchFamily="34" charset="0"/>
+                <a:ea typeface="Arial" pitchFamily="34" charset="-122"/>
+                <a:cs typeface="Arial" pitchFamily="34" charset="-120"/>
+              </a:rPr>
+              <a:t>(2 Corinthians 13:5)</a:t>
+            </a:r>
+            <a:endParaRPr lang="en-US" dirty="0"/>
           </a:p>
         </p:txBody>
       </p:sp>
@@ -6189,18 +6357,18 @@
           <a:bodyPr wrap="square" lIns="0" tIns="0" rIns="0" bIns="0" rtlCol="0" anchor="t"/>
           <a:lstStyle/>
           <a:p>
-            <a:pPr algn="ctr" indent="0" marL="0">
+            <a:pPr marL="0" indent="0" algn="ctr">
               <a:buNone/>
             </a:pPr>
             <a:r>
-              <a:rPr lang="en-US" sz="1300" b="1" u="sng" dirty="0">
+              <a:rPr lang="en-US" b="1" u="sng" dirty="0">
                 <a:solidFill>
                   <a:srgbClr val="4F81BD"/>
                 </a:solidFill>
                 <a:latin typeface="Arial" pitchFamily="34" charset="0"/>
                 <a:ea typeface="Arial" pitchFamily="34" charset="-122"/>
                 <a:cs typeface="Arial" pitchFamily="34" charset="-120"/>
-                <a:hlinkClick r:id="rId1" invalidUrl="" action="" tgtFrame="" tooltip="" history="1" highlightClick="0" endSnd="0">
+                <a:hlinkClick r:id="rId3">
                   <a:extLst>
                     <a:ext uri="{A12FA001-AC4F-418D-AE19-62706E023703}">
                       <ahyp:hlinkClr xmlns:ahyp="http://schemas.microsoft.com/office/drawing/2018/hyperlinkcolor" val="tx"/>
@@ -6208,9 +6376,38 @@
                   </a:extLst>
                 </a:hlinkClick>
               </a:rPr>
-              <a:t>https://tinyurl.com/TeachTheWord</a:t>
-            </a:r>
-            <a:endParaRPr lang="en-US" sz="1600" dirty="0"/>
+              <a:t>https://</a:t>
+            </a:r>
+            <a:r>
+              <a:rPr lang="en-US" b="1" u="sng" dirty="0" err="1">
+                <a:solidFill>
+                  <a:srgbClr val="4F81BD"/>
+                </a:solidFill>
+                <a:latin typeface="Arial" pitchFamily="34" charset="0"/>
+                <a:ea typeface="Arial" pitchFamily="34" charset="-122"/>
+                <a:cs typeface="Arial" pitchFamily="34" charset="-120"/>
+                <a:hlinkClick r:id="rId3">
+                  <a:extLst>
+                    <a:ext uri="{A12FA001-AC4F-418D-AE19-62706E023703}">
+                      <ahyp:hlinkClr xmlns:ahyp="http://schemas.microsoft.com/office/drawing/2018/hyperlinkcolor" val="tx"/>
+                    </a:ext>
+                  </a:extLst>
+                </a:hlinkClick>
+              </a:rPr>
+              <a:t>TeachTheWord</a:t>
+            </a:r>
+            <a:r>
+              <a:rPr lang="en-US" b="1" u="sng" dirty="0" err="1">
+                <a:solidFill>
+                  <a:srgbClr val="4F81BD"/>
+                </a:solidFill>
+                <a:latin typeface="Arial" pitchFamily="34" charset="0"/>
+                <a:ea typeface="Arial" pitchFamily="34" charset="-122"/>
+                <a:cs typeface="Arial" pitchFamily="34" charset="-120"/>
+              </a:rPr>
+              <a:t>.Church</a:t>
+            </a:r>
+            <a:endParaRPr lang="en-US" sz="2400" dirty="0"/>
           </a:p>
         </p:txBody>
       </p:sp>
@@ -6228,26 +6425,26 @@
               <p:cTn id="2" dur="indefinite" nodeType="mainSeq">
                 <p:childTnLst>
                   <p:par>
-                    <p:cTn id="7" fill="hold">
+                    <p:cTn id="3" fill="hold">
                       <p:stCondLst>
                         <p:cond delay="indefinite"/>
                       </p:stCondLst>
                       <p:childTnLst>
                         <p:par>
-                          <p:cTn id="8" fill="hold">
+                          <p:cTn id="4" fill="hold">
                             <p:stCondLst>
                               <p:cond delay="0"/>
                             </p:stCondLst>
                             <p:childTnLst>
                               <p:par>
-                                <p:cTn id="3" presetID="42" presetClass="entr" presetSubtype="0" fill="hold" grpId="0" nodeType="clickEffect">
+                                <p:cTn id="5" presetID="42" presetClass="entr" presetSubtype="0" fill="hold" nodeType="clickEffect">
                                   <p:stCondLst>
                                     <p:cond delay="0"/>
                                   </p:stCondLst>
                                   <p:childTnLst>
                                     <p:set>
                                       <p:cBhvr>
-                                        <p:cTn id="4" dur="1" fill="hold">
+                                        <p:cTn id="6" dur="1" fill="hold">
                                           <p:stCondLst>
                                             <p:cond delay="0"/>
                                           </p:stCondLst>
@@ -6265,7 +6462,7 @@
                                     </p:set>
                                     <p:animEffect transition="in" filter="fade">
                                       <p:cBhvr>
-                                        <p:cTn id="5" dur="1000"/>
+                                        <p:cTn id="7" dur="1000"/>
                                         <p:tgtEl>
                                           <p:spTgt spid="4"/>
                                         </p:tgtEl>
@@ -6273,7 +6470,7 @@
                                     </p:animEffect>
                                     <p:anim calcmode="lin" valueType="num">
                                       <p:cBhvr>
-                                        <p:cTn id="6" dur="1000" fill="hold"/>
+                                        <p:cTn id="8" dur="1000" fill="hold"/>
                                         <p:tgtEl>
                                           <p:spTgt spid="4"/>
                                         </p:tgtEl>
@@ -6304,26 +6501,26 @@
                     </p:cTn>
                   </p:par>
                   <p:par>
-                    <p:cTn id="13" fill="hold">
+                    <p:cTn id="9" fill="hold">
                       <p:stCondLst>
                         <p:cond delay="indefinite"/>
                       </p:stCondLst>
                       <p:childTnLst>
                         <p:par>
-                          <p:cTn id="14" fill="hold">
+                          <p:cTn id="10" fill="hold">
                             <p:stCondLst>
                               <p:cond delay="0"/>
                             </p:stCondLst>
                             <p:childTnLst>
                               <p:par>
-                                <p:cTn id="9" presetID="42" presetClass="entr" presetSubtype="0" fill="hold" grpId="0" nodeType="clickEffect">
+                                <p:cTn id="11" presetID="42" presetClass="entr" presetSubtype="0" fill="hold" nodeType="clickEffect">
                                   <p:stCondLst>
                                     <p:cond delay="0"/>
                                   </p:stCondLst>
                                   <p:childTnLst>
                                     <p:set>
                                       <p:cBhvr>
-                                        <p:cTn id="10" dur="1" fill="hold">
+                                        <p:cTn id="12" dur="1" fill="hold">
                                           <p:stCondLst>
                                             <p:cond delay="0"/>
                                           </p:stCondLst>
@@ -6341,7 +6538,7 @@
                                     </p:set>
                                     <p:animEffect transition="in" filter="fade">
                                       <p:cBhvr>
-                                        <p:cTn id="11" dur="1000"/>
+                                        <p:cTn id="13" dur="1000"/>
                                         <p:tgtEl>
                                           <p:spTgt spid="5"/>
                                         </p:tgtEl>
@@ -6349,7 +6546,7 @@
                                     </p:animEffect>
                                     <p:anim calcmode="lin" valueType="num">
                                       <p:cBhvr>
-                                        <p:cTn id="12" dur="1000" fill="hold"/>
+                                        <p:cTn id="14" dur="1000" fill="hold"/>
                                         <p:tgtEl>
                                           <p:spTgt spid="5"/>
                                         </p:tgtEl>
@@ -6380,26 +6577,26 @@
                     </p:cTn>
                   </p:par>
                   <p:par>
-                    <p:cTn id="19" fill="hold">
+                    <p:cTn id="15" fill="hold">
                       <p:stCondLst>
                         <p:cond delay="indefinite"/>
                       </p:stCondLst>
                       <p:childTnLst>
                         <p:par>
-                          <p:cTn id="20" fill="hold">
+                          <p:cTn id="16" fill="hold">
                             <p:stCondLst>
                               <p:cond delay="0"/>
                             </p:stCondLst>
                             <p:childTnLst>
                               <p:par>
-                                <p:cTn id="15" presetID="42" presetClass="entr" presetSubtype="0" fill="hold" grpId="0" nodeType="clickEffect">
+                                <p:cTn id="17" presetID="42" presetClass="entr" presetSubtype="0" fill="hold" nodeType="clickEffect">
                                   <p:stCondLst>
                                     <p:cond delay="0"/>
                                   </p:stCondLst>
                                   <p:childTnLst>
                                     <p:set>
                                       <p:cBhvr>
-                                        <p:cTn id="16" dur="1" fill="hold">
+                                        <p:cTn id="18" dur="1" fill="hold">
                                           <p:stCondLst>
                                             <p:cond delay="0"/>
                                           </p:stCondLst>
@@ -6417,7 +6614,7 @@
                                     </p:set>
                                     <p:animEffect transition="in" filter="fade">
                                       <p:cBhvr>
-                                        <p:cTn id="17" dur="1000"/>
+                                        <p:cTn id="19" dur="1000"/>
                                         <p:tgtEl>
                                           <p:spTgt spid="6"/>
                                         </p:tgtEl>
@@ -6425,7 +6622,7 @@
                                     </p:animEffect>
                                     <p:anim calcmode="lin" valueType="num">
                                       <p:cBhvr>
-                                        <p:cTn id="18" dur="1000" fill="hold"/>
+                                        <p:cTn id="20" dur="1000" fill="hold"/>
                                         <p:tgtEl>
                                           <p:spTgt spid="6"/>
                                         </p:tgtEl>
@@ -6456,26 +6653,26 @@
                     </p:cTn>
                   </p:par>
                   <p:par>
-                    <p:cTn id="25" fill="hold">
+                    <p:cTn id="21" fill="hold">
                       <p:stCondLst>
                         <p:cond delay="indefinite"/>
                       </p:stCondLst>
                       <p:childTnLst>
                         <p:par>
-                          <p:cTn id="26" fill="hold">
+                          <p:cTn id="22" fill="hold">
                             <p:stCondLst>
                               <p:cond delay="0"/>
                             </p:stCondLst>
                             <p:childTnLst>
                               <p:par>
-                                <p:cTn id="21" presetID="42" presetClass="entr" presetSubtype="0" fill="hold" grpId="0" nodeType="clickEffect">
+                                <p:cTn id="23" presetID="42" presetClass="entr" presetSubtype="0" fill="hold" nodeType="clickEffect">
                                   <p:stCondLst>
                                     <p:cond delay="0"/>
                                   </p:stCondLst>
                                   <p:childTnLst>
                                     <p:set>
                                       <p:cBhvr>
-                                        <p:cTn id="22" dur="1" fill="hold">
+                                        <p:cTn id="24" dur="1" fill="hold">
                                           <p:stCondLst>
                                             <p:cond delay="0"/>
                                           </p:stCondLst>
@@ -6493,7 +6690,7 @@
                                     </p:set>
                                     <p:animEffect transition="in" filter="fade">
                                       <p:cBhvr>
-                                        <p:cTn id="23" dur="1000"/>
+                                        <p:cTn id="25" dur="1000"/>
                                         <p:tgtEl>
                                           <p:spTgt spid="7"/>
                                         </p:tgtEl>
@@ -6501,7 +6698,7 @@
                                     </p:animEffect>
                                     <p:anim calcmode="lin" valueType="num">
                                       <p:cBhvr>
-                                        <p:cTn id="24" dur="1000" fill="hold"/>
+                                        <p:cTn id="26" dur="1000" fill="hold"/>
                                         <p:tgtEl>
                                           <p:spTgt spid="7"/>
                                         </p:tgtEl>
@@ -6849,4 +7046,319 @@
     </a:ext>
   </a:extLst>
 </a:theme>
+</file>
+
+<file path=ppt/theme/theme2.xml><?xml version="1.0" encoding="utf-8"?>
+<a:theme xmlns:a="http://schemas.openxmlformats.org/drawingml/2006/main" name="Office Theme">
+  <a:themeElements>
+    <a:clrScheme name="Office">
+      <a:dk1>
+        <a:sysClr val="windowText" lastClr="000000"/>
+      </a:dk1>
+      <a:lt1>
+        <a:sysClr val="window" lastClr="FFFFFF"/>
+      </a:lt1>
+      <a:dk2>
+        <a:srgbClr val="0E2841"/>
+      </a:dk2>
+      <a:lt2>
+        <a:srgbClr val="E8E8E8"/>
+      </a:lt2>
+      <a:accent1>
+        <a:srgbClr val="156082"/>
+      </a:accent1>
+      <a:accent2>
+        <a:srgbClr val="E97132"/>
+      </a:accent2>
+      <a:accent3>
+        <a:srgbClr val="196B24"/>
+      </a:accent3>
+      <a:accent4>
+        <a:srgbClr val="0F9ED5"/>
+      </a:accent4>
+      <a:accent5>
+        <a:srgbClr val="A02B93"/>
+      </a:accent5>
+      <a:accent6>
+        <a:srgbClr val="4EA72E"/>
+      </a:accent6>
+      <a:hlink>
+        <a:srgbClr val="467886"/>
+      </a:hlink>
+      <a:folHlink>
+        <a:srgbClr val="96607D"/>
+      </a:folHlink>
+    </a:clrScheme>
+    <a:fontScheme name="Office">
+      <a:majorFont>
+        <a:latin typeface="Aptos Display" panose="02110004020202020204"/>
+        <a:ea typeface=""/>
+        <a:cs typeface=""/>
+        <a:font script="Jpan" typeface="游ゴシック Light"/>
+        <a:font script="Hang" typeface="맑은 고딕"/>
+        <a:font script="Hans" typeface="等线 Light"/>
+        <a:font script="Hant" typeface="新細明體"/>
+        <a:font script="Arab" typeface="Times New Roman"/>
+        <a:font script="Hebr" typeface="Times New Roman"/>
+        <a:font script="Thai" typeface="Angsana New"/>
+        <a:font script="Ethi" typeface="Nyala"/>
+        <a:font script="Beng" typeface="Vrinda"/>
+        <a:font script="Gujr" typeface="Shruti"/>
+        <a:font script="Khmr" typeface="MoolBoran"/>
+        <a:font script="Knda" typeface="Tunga"/>
+        <a:font script="Guru" typeface="Raavi"/>
+        <a:font script="Cans" typeface="Euphemia"/>
+        <a:font script="Cher" typeface="Plantagenet Cherokee"/>
+        <a:font script="Yiii" typeface="Microsoft Yi Baiti"/>
+        <a:font script="Tibt" typeface="Microsoft Himalaya"/>
+        <a:font script="Thaa" typeface="MV Boli"/>
+        <a:font script="Deva" typeface="Mangal"/>
+        <a:font script="Telu" typeface="Gautami"/>
+        <a:font script="Taml" typeface="Latha"/>
+        <a:font script="Syrc" typeface="Estrangelo Edessa"/>
+        <a:font script="Orya" typeface="Kalinga"/>
+        <a:font script="Mlym" typeface="Kartika"/>
+        <a:font script="Laoo" typeface="DokChampa"/>
+        <a:font script="Sinh" typeface="Iskoola Pota"/>
+        <a:font script="Mong" typeface="Mongolian Baiti"/>
+        <a:font script="Viet" typeface="Times New Roman"/>
+        <a:font script="Uigh" typeface="Microsoft Uighur"/>
+        <a:font script="Geor" typeface="Sylfaen"/>
+        <a:font script="Armn" typeface="Arial"/>
+        <a:font script="Bugi" typeface="Leelawadee UI"/>
+        <a:font script="Bopo" typeface="Microsoft JhengHei"/>
+        <a:font script="Java" typeface="Javanese Text"/>
+        <a:font script="Lisu" typeface="Segoe UI"/>
+        <a:font script="Mymr" typeface="Myanmar Text"/>
+        <a:font script="Nkoo" typeface="Ebrima"/>
+        <a:font script="Olck" typeface="Nirmala UI"/>
+        <a:font script="Osma" typeface="Ebrima"/>
+        <a:font script="Phag" typeface="Phagspa"/>
+        <a:font script="Syrn" typeface="Estrangelo Edessa"/>
+        <a:font script="Syrj" typeface="Estrangelo Edessa"/>
+        <a:font script="Syre" typeface="Estrangelo Edessa"/>
+        <a:font script="Sora" typeface="Nirmala UI"/>
+        <a:font script="Tale" typeface="Microsoft Tai Le"/>
+        <a:font script="Talu" typeface="Microsoft New Tai Lue"/>
+        <a:font script="Tfng" typeface="Ebrima"/>
+      </a:majorFont>
+      <a:minorFont>
+        <a:latin typeface="Aptos" panose="02110004020202020204"/>
+        <a:ea typeface=""/>
+        <a:cs typeface=""/>
+        <a:font script="Jpan" typeface="游ゴシック"/>
+        <a:font script="Hang" typeface="맑은 고딕"/>
+        <a:font script="Hans" typeface="等线"/>
+        <a:font script="Hant" typeface="新細明體"/>
+        <a:font script="Arab" typeface="Arial"/>
+        <a:font script="Hebr" typeface="Arial"/>
+        <a:font script="Thai" typeface="Cordia New"/>
+        <a:font script="Ethi" typeface="Nyala"/>
+        <a:font script="Beng" typeface="Vrinda"/>
+        <a:font script="Gujr" typeface="Shruti"/>
+        <a:font script="Khmr" typeface="DaunPenh"/>
+        <a:font script="Knda" typeface="Tunga"/>
+        <a:font script="Guru" typeface="Raavi"/>
+        <a:font script="Cans" typeface="Euphemia"/>
+        <a:font script="Cher" typeface="Plantagenet Cherokee"/>
+        <a:font script="Yiii" typeface="Microsoft Yi Baiti"/>
+        <a:font script="Tibt" typeface="Microsoft Himalaya"/>
+        <a:font script="Thaa" typeface="MV Boli"/>
+        <a:font script="Deva" typeface="Mangal"/>
+        <a:font script="Telu" typeface="Gautami"/>
+        <a:font script="Taml" typeface="Latha"/>
+        <a:font script="Syrc" typeface="Estrangelo Edessa"/>
+        <a:font script="Orya" typeface="Kalinga"/>
+        <a:font script="Mlym" typeface="Kartika"/>
+        <a:font script="Laoo" typeface="DokChampa"/>
+        <a:font script="Sinh" typeface="Iskoola Pota"/>
+        <a:font script="Mong" typeface="Mongolian Baiti"/>
+        <a:font script="Viet" typeface="Arial"/>
+        <a:font script="Uigh" typeface="Microsoft Uighur"/>
+        <a:font script="Geor" typeface="Sylfaen"/>
+        <a:font script="Armn" typeface="Arial"/>
+        <a:font script="Bugi" typeface="Leelawadee UI"/>
+        <a:font script="Bopo" typeface="Microsoft JhengHei"/>
+        <a:font script="Java" typeface="Javanese Text"/>
+        <a:font script="Lisu" typeface="Segoe UI"/>
+        <a:font script="Mymr" typeface="Myanmar Text"/>
+        <a:font script="Nkoo" typeface="Ebrima"/>
+        <a:font script="Olck" typeface="Nirmala UI"/>
+        <a:font script="Osma" typeface="Ebrima"/>
+        <a:font script="Phag" typeface="Phagspa"/>
+        <a:font script="Syrn" typeface="Estrangelo Edessa"/>
+        <a:font script="Syrj" typeface="Estrangelo Edessa"/>
+        <a:font script="Syre" typeface="Estrangelo Edessa"/>
+        <a:font script="Sora" typeface="Nirmala UI"/>
+        <a:font script="Tale" typeface="Microsoft Tai Le"/>
+        <a:font script="Talu" typeface="Microsoft New Tai Lue"/>
+        <a:font script="Tfng" typeface="Ebrima"/>
+      </a:minorFont>
+    </a:fontScheme>
+    <a:fmtScheme name="Office">
+      <a:fillStyleLst>
+        <a:solidFill>
+          <a:schemeClr val="phClr"/>
+        </a:solidFill>
+        <a:gradFill rotWithShape="1">
+          <a:gsLst>
+            <a:gs pos="0">
+              <a:schemeClr val="phClr">
+                <a:lumMod val="110000"/>
+                <a:satMod val="105000"/>
+                <a:tint val="67000"/>
+              </a:schemeClr>
+            </a:gs>
+            <a:gs pos="50000">
+              <a:schemeClr val="phClr">
+                <a:lumMod val="105000"/>
+                <a:satMod val="103000"/>
+                <a:tint val="73000"/>
+              </a:schemeClr>
+            </a:gs>
+            <a:gs pos="100000">
+              <a:schemeClr val="phClr">
+                <a:lumMod val="105000"/>
+                <a:satMod val="109000"/>
+                <a:tint val="81000"/>
+              </a:schemeClr>
+            </a:gs>
+          </a:gsLst>
+          <a:lin ang="5400000" scaled="0"/>
+        </a:gradFill>
+        <a:gradFill rotWithShape="1">
+          <a:gsLst>
+            <a:gs pos="0">
+              <a:schemeClr val="phClr">
+                <a:satMod val="103000"/>
+                <a:lumMod val="102000"/>
+                <a:tint val="94000"/>
+              </a:schemeClr>
+            </a:gs>
+            <a:gs pos="50000">
+              <a:schemeClr val="phClr">
+                <a:satMod val="110000"/>
+                <a:lumMod val="100000"/>
+                <a:shade val="100000"/>
+              </a:schemeClr>
+            </a:gs>
+            <a:gs pos="100000">
+              <a:schemeClr val="phClr">
+                <a:lumMod val="99000"/>
+                <a:satMod val="120000"/>
+                <a:shade val="78000"/>
+              </a:schemeClr>
+            </a:gs>
+          </a:gsLst>
+          <a:lin ang="5400000" scaled="0"/>
+        </a:gradFill>
+      </a:fillStyleLst>
+      <a:lnStyleLst>
+        <a:ln w="12700" cap="flat" cmpd="sng" algn="ctr">
+          <a:solidFill>
+            <a:schemeClr val="phClr"/>
+          </a:solidFill>
+          <a:prstDash val="solid"/>
+          <a:miter lim="800000"/>
+        </a:ln>
+        <a:ln w="19050" cap="flat" cmpd="sng" algn="ctr">
+          <a:solidFill>
+            <a:schemeClr val="phClr"/>
+          </a:solidFill>
+          <a:prstDash val="solid"/>
+          <a:miter lim="800000"/>
+        </a:ln>
+        <a:ln w="25400" cap="flat" cmpd="sng" algn="ctr">
+          <a:solidFill>
+            <a:schemeClr val="phClr"/>
+          </a:solidFill>
+          <a:prstDash val="solid"/>
+          <a:miter lim="800000"/>
+        </a:ln>
+      </a:lnStyleLst>
+      <a:effectStyleLst>
+        <a:effectStyle>
+          <a:effectLst/>
+        </a:effectStyle>
+        <a:effectStyle>
+          <a:effectLst/>
+        </a:effectStyle>
+        <a:effectStyle>
+          <a:effectLst>
+            <a:outerShdw blurRad="57150" dist="19050" dir="5400000" algn="ctr" rotWithShape="0">
+              <a:srgbClr val="000000">
+                <a:alpha val="63000"/>
+              </a:srgbClr>
+            </a:outerShdw>
+          </a:effectLst>
+        </a:effectStyle>
+      </a:effectStyleLst>
+      <a:bgFillStyleLst>
+        <a:solidFill>
+          <a:schemeClr val="phClr"/>
+        </a:solidFill>
+        <a:solidFill>
+          <a:schemeClr val="phClr">
+            <a:tint val="95000"/>
+            <a:satMod val="170000"/>
+          </a:schemeClr>
+        </a:solidFill>
+        <a:gradFill rotWithShape="1">
+          <a:gsLst>
+            <a:gs pos="0">
+              <a:schemeClr val="phClr">
+                <a:tint val="93000"/>
+                <a:satMod val="150000"/>
+                <a:shade val="98000"/>
+                <a:lumMod val="102000"/>
+              </a:schemeClr>
+            </a:gs>
+            <a:gs pos="50000">
+              <a:schemeClr val="phClr">
+                <a:tint val="98000"/>
+                <a:satMod val="130000"/>
+                <a:shade val="90000"/>
+                <a:lumMod val="103000"/>
+              </a:schemeClr>
+            </a:gs>
+            <a:gs pos="100000">
+              <a:schemeClr val="phClr">
+                <a:shade val="63000"/>
+                <a:satMod val="120000"/>
+              </a:schemeClr>
+            </a:gs>
+          </a:gsLst>
+          <a:lin ang="5400000" scaled="0"/>
+        </a:gradFill>
+      </a:bgFillStyleLst>
+    </a:fmtScheme>
+  </a:themeElements>
+  <a:objectDefaults>
+    <a:lnDef>
+      <a:spPr/>
+      <a:bodyPr/>
+      <a:lstStyle/>
+      <a:style>
+        <a:lnRef idx="2">
+          <a:schemeClr val="accent1"/>
+        </a:lnRef>
+        <a:fillRef idx="0">
+          <a:schemeClr val="accent1"/>
+        </a:fillRef>
+        <a:effectRef idx="1">
+          <a:schemeClr val="accent1"/>
+        </a:effectRef>
+        <a:fontRef idx="minor">
+          <a:schemeClr val="tx1"/>
+        </a:fontRef>
+      </a:style>
+    </a:lnDef>
+  </a:objectDefaults>
+  <a:extraClrSchemeLst/>
+  <a:extLst>
+    <a:ext uri="{05A4C25C-085E-4340-85A3-A5531E510DB2}">
+      <thm15:themeFamily xmlns:thm15="http://schemas.microsoft.com/office/thememl/2012/main" name="Office Theme" id="{2E142A2C-CD16-42D6-873A-C26D2A0506FA}" vid="{1BDDFF52-6CD6-40A5-AB3C-68EB2F1E4D0A}"/>
+    </a:ext>
+  </a:extLst>
+</a:theme>
 </file>